--- a/presentations/Sales Performance Analysis presentation.pptx
+++ b/presentations/Sales Performance Analysis presentation.pptx
@@ -9,12 +9,18 @@
     <p:sldId id="257" r:id="rId3"/>
     <p:sldId id="258" r:id="rId4"/>
     <p:sldId id="259" r:id="rId5"/>
+    <p:sldId id="260" r:id="rId6"/>
+    <p:sldId id="261" r:id="rId7"/>
+    <p:sldId id="262" r:id="rId8"/>
+    <p:sldId id="263" r:id="rId9"/>
+    <p:sldId id="264" r:id="rId10"/>
+    <p:sldId id="265" r:id="rId11"/>
   </p:sldIdLst>
   <p:notesMasterIdLst>
-    <p:notesMasterId r:id="rId6"/>
+    <p:notesMasterId r:id="rId12"/>
   </p:notesMasterIdLst>
-  <p:sldSz cx="12188952" cy="6858000"/>
-  <p:notesSz cx="6858000" cy="12188952"/>
+  <p:sldSz cx="9144000" cy="5148072"/>
+  <p:notesSz cx="5148072" cy="9144000"/>
   <p:defaultTextStyle>
     <a:lvl1pPr marL="0" algn="l" defTabSz="914400" rtl="0" eaLnBrk="1" latinLnBrk="0" hangingPunct="1">
       <a:defRPr sz="1800" kern="1200">
@@ -547,6 +553,94 @@
 </p:notes>
 </file>
 
+<file path=ppt/notesSlides/notesSlide10.xml><?xml version="1.0" encoding="utf-8"?>
+<p:notes xmlns:a="http://schemas.openxmlformats.org/drawingml/2006/main" xmlns:r="http://schemas.openxmlformats.org/officeDocument/2006/relationships" xmlns:p="http://schemas.openxmlformats.org/presentationml/2006/main">
+  <p:cSld>
+    <p:spTree>
+      <p:nvGrpSpPr>
+        <p:cNvPr id="1" name=""/>
+        <p:cNvGrpSpPr/>
+        <p:nvPr/>
+      </p:nvGrpSpPr>
+      <p:grpSpPr>
+        <a:xfrm>
+          <a:off x="0" y="0"/>
+          <a:ext cx="0" cy="0"/>
+          <a:chOff x="0" y="0"/>
+          <a:chExt cx="0" cy="0"/>
+        </a:xfrm>
+      </p:grpSpPr>
+      <p:sp>
+        <p:nvSpPr>
+          <p:cNvPr id="2" name="Slide Image Placeholder 1"/>
+          <p:cNvSpPr>
+            <a:spLocks noGrp="1" noRot="1" noChangeAspect="1"/>
+          </p:cNvSpPr>
+          <p:nvPr>
+            <p:ph type="sldImg"/>
+          </p:nvPr>
+        </p:nvSpPr>
+        <p:spPr/>
+      </p:sp>
+      <p:sp>
+        <p:nvSpPr>
+          <p:cNvPr id="3" name="Notes Placeholder 2"/>
+          <p:cNvSpPr>
+            <a:spLocks noGrp="1"/>
+          </p:cNvSpPr>
+          <p:nvPr>
+            <p:ph type="body" idx="1"/>
+          </p:nvPr>
+        </p:nvSpPr>
+        <p:spPr/>
+        <p:txBody>
+          <a:bodyPr/>
+          <a:lstStyle/>
+          <a:p>
+            <a:r>
+              <a:rPr lang="en-US" dirty="0"/>
+              <a:t/>
+            </a:r>
+            <a:endParaRPr lang="en-US" dirty="0"/>
+          </a:p>
+        </p:txBody>
+      </p:sp>
+      <p:sp>
+        <p:nvSpPr>
+          <p:cNvPr id="4" name="Slide Number Placeholder 3"/>
+          <p:cNvSpPr>
+            <a:spLocks noGrp="1"/>
+          </p:cNvSpPr>
+          <p:nvPr>
+            <p:ph type="sldNum" sz="quarter" idx="10"/>
+          </p:nvPr>
+        </p:nvSpPr>
+        <p:spPr/>
+        <p:txBody>
+          <a:bodyPr/>
+          <a:lstStyle/>
+          <a:p>
+            <a:fld id="{F7021451-1387-4CA6-816F-3879F97B5CBC}" type="slidenum">
+              <a:rPr lang="en-US"/>
+              <a:t>10</a:t>
+            </a:fld>
+            <a:endParaRPr lang="en-US"/>
+          </a:p>
+        </p:txBody>
+      </p:sp>
+    </p:spTree>
+    <p:extLst>
+      <p:ext uri="{BB962C8B-B14F-4D97-AF65-F5344CB8AC3E}">
+        <p14:creationId xmlns:p14="http://schemas.microsoft.com/office/powerpoint/2010/main" val="1024086991"/>
+      </p:ext>
+    </p:extLst>
+  </p:cSld>
+  <p:clrMapOvr>
+    <a:masterClrMapping/>
+  </p:clrMapOvr>
+</p:notes>
+</file>
+
 <file path=ppt/notesSlides/notesSlide2.xml><?xml version="1.0" encoding="utf-8"?>
 <p:notes xmlns:a="http://schemas.openxmlformats.org/drawingml/2006/main" xmlns:r="http://schemas.openxmlformats.org/officeDocument/2006/relationships" xmlns:p="http://schemas.openxmlformats.org/presentationml/2006/main">
   <p:cSld>
@@ -793,6 +887,446 @@
             <a:fld id="{F7021451-1387-4CA6-816F-3879F97B5CBC}" type="slidenum">
               <a:rPr lang="en-US"/>
               <a:t>4</a:t>
+            </a:fld>
+            <a:endParaRPr lang="en-US"/>
+          </a:p>
+        </p:txBody>
+      </p:sp>
+    </p:spTree>
+    <p:extLst>
+      <p:ext uri="{BB962C8B-B14F-4D97-AF65-F5344CB8AC3E}">
+        <p14:creationId xmlns:p14="http://schemas.microsoft.com/office/powerpoint/2010/main" val="1024086991"/>
+      </p:ext>
+    </p:extLst>
+  </p:cSld>
+  <p:clrMapOvr>
+    <a:masterClrMapping/>
+  </p:clrMapOvr>
+</p:notes>
+</file>
+
+<file path=ppt/notesSlides/notesSlide5.xml><?xml version="1.0" encoding="utf-8"?>
+<p:notes xmlns:a="http://schemas.openxmlformats.org/drawingml/2006/main" xmlns:r="http://schemas.openxmlformats.org/officeDocument/2006/relationships" xmlns:p="http://schemas.openxmlformats.org/presentationml/2006/main">
+  <p:cSld>
+    <p:spTree>
+      <p:nvGrpSpPr>
+        <p:cNvPr id="1" name=""/>
+        <p:cNvGrpSpPr/>
+        <p:nvPr/>
+      </p:nvGrpSpPr>
+      <p:grpSpPr>
+        <a:xfrm>
+          <a:off x="0" y="0"/>
+          <a:ext cx="0" cy="0"/>
+          <a:chOff x="0" y="0"/>
+          <a:chExt cx="0" cy="0"/>
+        </a:xfrm>
+      </p:grpSpPr>
+      <p:sp>
+        <p:nvSpPr>
+          <p:cNvPr id="2" name="Slide Image Placeholder 1"/>
+          <p:cNvSpPr>
+            <a:spLocks noGrp="1" noRot="1" noChangeAspect="1"/>
+          </p:cNvSpPr>
+          <p:nvPr>
+            <p:ph type="sldImg"/>
+          </p:nvPr>
+        </p:nvSpPr>
+        <p:spPr/>
+      </p:sp>
+      <p:sp>
+        <p:nvSpPr>
+          <p:cNvPr id="3" name="Notes Placeholder 2"/>
+          <p:cNvSpPr>
+            <a:spLocks noGrp="1"/>
+          </p:cNvSpPr>
+          <p:nvPr>
+            <p:ph type="body" idx="1"/>
+          </p:nvPr>
+        </p:nvSpPr>
+        <p:spPr/>
+        <p:txBody>
+          <a:bodyPr/>
+          <a:lstStyle/>
+          <a:p>
+            <a:r>
+              <a:rPr lang="en-US" dirty="0"/>
+              <a:t/>
+            </a:r>
+            <a:endParaRPr lang="en-US" dirty="0"/>
+          </a:p>
+        </p:txBody>
+      </p:sp>
+      <p:sp>
+        <p:nvSpPr>
+          <p:cNvPr id="4" name="Slide Number Placeholder 3"/>
+          <p:cNvSpPr>
+            <a:spLocks noGrp="1"/>
+          </p:cNvSpPr>
+          <p:nvPr>
+            <p:ph type="sldNum" sz="quarter" idx="10"/>
+          </p:nvPr>
+        </p:nvSpPr>
+        <p:spPr/>
+        <p:txBody>
+          <a:bodyPr/>
+          <a:lstStyle/>
+          <a:p>
+            <a:fld id="{F7021451-1387-4CA6-816F-3879F97B5CBC}" type="slidenum">
+              <a:rPr lang="en-US"/>
+              <a:t>5</a:t>
+            </a:fld>
+            <a:endParaRPr lang="en-US"/>
+          </a:p>
+        </p:txBody>
+      </p:sp>
+    </p:spTree>
+    <p:extLst>
+      <p:ext uri="{BB962C8B-B14F-4D97-AF65-F5344CB8AC3E}">
+        <p14:creationId xmlns:p14="http://schemas.microsoft.com/office/powerpoint/2010/main" val="1024086991"/>
+      </p:ext>
+    </p:extLst>
+  </p:cSld>
+  <p:clrMapOvr>
+    <a:masterClrMapping/>
+  </p:clrMapOvr>
+</p:notes>
+</file>
+
+<file path=ppt/notesSlides/notesSlide6.xml><?xml version="1.0" encoding="utf-8"?>
+<p:notes xmlns:a="http://schemas.openxmlformats.org/drawingml/2006/main" xmlns:r="http://schemas.openxmlformats.org/officeDocument/2006/relationships" xmlns:p="http://schemas.openxmlformats.org/presentationml/2006/main">
+  <p:cSld>
+    <p:spTree>
+      <p:nvGrpSpPr>
+        <p:cNvPr id="1" name=""/>
+        <p:cNvGrpSpPr/>
+        <p:nvPr/>
+      </p:nvGrpSpPr>
+      <p:grpSpPr>
+        <a:xfrm>
+          <a:off x="0" y="0"/>
+          <a:ext cx="0" cy="0"/>
+          <a:chOff x="0" y="0"/>
+          <a:chExt cx="0" cy="0"/>
+        </a:xfrm>
+      </p:grpSpPr>
+      <p:sp>
+        <p:nvSpPr>
+          <p:cNvPr id="2" name="Slide Image Placeholder 1"/>
+          <p:cNvSpPr>
+            <a:spLocks noGrp="1" noRot="1" noChangeAspect="1"/>
+          </p:cNvSpPr>
+          <p:nvPr>
+            <p:ph type="sldImg"/>
+          </p:nvPr>
+        </p:nvSpPr>
+        <p:spPr/>
+      </p:sp>
+      <p:sp>
+        <p:nvSpPr>
+          <p:cNvPr id="3" name="Notes Placeholder 2"/>
+          <p:cNvSpPr>
+            <a:spLocks noGrp="1"/>
+          </p:cNvSpPr>
+          <p:nvPr>
+            <p:ph type="body" idx="1"/>
+          </p:nvPr>
+        </p:nvSpPr>
+        <p:spPr/>
+        <p:txBody>
+          <a:bodyPr/>
+          <a:lstStyle/>
+          <a:p>
+            <a:r>
+              <a:rPr lang="en-US" dirty="0"/>
+              <a:t/>
+            </a:r>
+            <a:endParaRPr lang="en-US" dirty="0"/>
+          </a:p>
+        </p:txBody>
+      </p:sp>
+      <p:sp>
+        <p:nvSpPr>
+          <p:cNvPr id="4" name="Slide Number Placeholder 3"/>
+          <p:cNvSpPr>
+            <a:spLocks noGrp="1"/>
+          </p:cNvSpPr>
+          <p:nvPr>
+            <p:ph type="sldNum" sz="quarter" idx="10"/>
+          </p:nvPr>
+        </p:nvSpPr>
+        <p:spPr/>
+        <p:txBody>
+          <a:bodyPr/>
+          <a:lstStyle/>
+          <a:p>
+            <a:fld id="{F7021451-1387-4CA6-816F-3879F97B5CBC}" type="slidenum">
+              <a:rPr lang="en-US"/>
+              <a:t>6</a:t>
+            </a:fld>
+            <a:endParaRPr lang="en-US"/>
+          </a:p>
+        </p:txBody>
+      </p:sp>
+    </p:spTree>
+    <p:extLst>
+      <p:ext uri="{BB962C8B-B14F-4D97-AF65-F5344CB8AC3E}">
+        <p14:creationId xmlns:p14="http://schemas.microsoft.com/office/powerpoint/2010/main" val="1024086991"/>
+      </p:ext>
+    </p:extLst>
+  </p:cSld>
+  <p:clrMapOvr>
+    <a:masterClrMapping/>
+  </p:clrMapOvr>
+</p:notes>
+</file>
+
+<file path=ppt/notesSlides/notesSlide7.xml><?xml version="1.0" encoding="utf-8"?>
+<p:notes xmlns:a="http://schemas.openxmlformats.org/drawingml/2006/main" xmlns:r="http://schemas.openxmlformats.org/officeDocument/2006/relationships" xmlns:p="http://schemas.openxmlformats.org/presentationml/2006/main">
+  <p:cSld>
+    <p:spTree>
+      <p:nvGrpSpPr>
+        <p:cNvPr id="1" name=""/>
+        <p:cNvGrpSpPr/>
+        <p:nvPr/>
+      </p:nvGrpSpPr>
+      <p:grpSpPr>
+        <a:xfrm>
+          <a:off x="0" y="0"/>
+          <a:ext cx="0" cy="0"/>
+          <a:chOff x="0" y="0"/>
+          <a:chExt cx="0" cy="0"/>
+        </a:xfrm>
+      </p:grpSpPr>
+      <p:sp>
+        <p:nvSpPr>
+          <p:cNvPr id="2" name="Slide Image Placeholder 1"/>
+          <p:cNvSpPr>
+            <a:spLocks noGrp="1" noRot="1" noChangeAspect="1"/>
+          </p:cNvSpPr>
+          <p:nvPr>
+            <p:ph type="sldImg"/>
+          </p:nvPr>
+        </p:nvSpPr>
+        <p:spPr/>
+      </p:sp>
+      <p:sp>
+        <p:nvSpPr>
+          <p:cNvPr id="3" name="Notes Placeholder 2"/>
+          <p:cNvSpPr>
+            <a:spLocks noGrp="1"/>
+          </p:cNvSpPr>
+          <p:nvPr>
+            <p:ph type="body" idx="1"/>
+          </p:nvPr>
+        </p:nvSpPr>
+        <p:spPr/>
+        <p:txBody>
+          <a:bodyPr/>
+          <a:lstStyle/>
+          <a:p>
+            <a:r>
+              <a:rPr lang="en-US" dirty="0"/>
+              <a:t/>
+            </a:r>
+            <a:endParaRPr lang="en-US" dirty="0"/>
+          </a:p>
+        </p:txBody>
+      </p:sp>
+      <p:sp>
+        <p:nvSpPr>
+          <p:cNvPr id="4" name="Slide Number Placeholder 3"/>
+          <p:cNvSpPr>
+            <a:spLocks noGrp="1"/>
+          </p:cNvSpPr>
+          <p:nvPr>
+            <p:ph type="sldNum" sz="quarter" idx="10"/>
+          </p:nvPr>
+        </p:nvSpPr>
+        <p:spPr/>
+        <p:txBody>
+          <a:bodyPr/>
+          <a:lstStyle/>
+          <a:p>
+            <a:fld id="{F7021451-1387-4CA6-816F-3879F97B5CBC}" type="slidenum">
+              <a:rPr lang="en-US"/>
+              <a:t>7</a:t>
+            </a:fld>
+            <a:endParaRPr lang="en-US"/>
+          </a:p>
+        </p:txBody>
+      </p:sp>
+    </p:spTree>
+    <p:extLst>
+      <p:ext uri="{BB962C8B-B14F-4D97-AF65-F5344CB8AC3E}">
+        <p14:creationId xmlns:p14="http://schemas.microsoft.com/office/powerpoint/2010/main" val="1024086991"/>
+      </p:ext>
+    </p:extLst>
+  </p:cSld>
+  <p:clrMapOvr>
+    <a:masterClrMapping/>
+  </p:clrMapOvr>
+</p:notes>
+</file>
+
+<file path=ppt/notesSlides/notesSlide8.xml><?xml version="1.0" encoding="utf-8"?>
+<p:notes xmlns:a="http://schemas.openxmlformats.org/drawingml/2006/main" xmlns:r="http://schemas.openxmlformats.org/officeDocument/2006/relationships" xmlns:p="http://schemas.openxmlformats.org/presentationml/2006/main">
+  <p:cSld>
+    <p:spTree>
+      <p:nvGrpSpPr>
+        <p:cNvPr id="1" name=""/>
+        <p:cNvGrpSpPr/>
+        <p:nvPr/>
+      </p:nvGrpSpPr>
+      <p:grpSpPr>
+        <a:xfrm>
+          <a:off x="0" y="0"/>
+          <a:ext cx="0" cy="0"/>
+          <a:chOff x="0" y="0"/>
+          <a:chExt cx="0" cy="0"/>
+        </a:xfrm>
+      </p:grpSpPr>
+      <p:sp>
+        <p:nvSpPr>
+          <p:cNvPr id="2" name="Slide Image Placeholder 1"/>
+          <p:cNvSpPr>
+            <a:spLocks noGrp="1" noRot="1" noChangeAspect="1"/>
+          </p:cNvSpPr>
+          <p:nvPr>
+            <p:ph type="sldImg"/>
+          </p:nvPr>
+        </p:nvSpPr>
+        <p:spPr/>
+      </p:sp>
+      <p:sp>
+        <p:nvSpPr>
+          <p:cNvPr id="3" name="Notes Placeholder 2"/>
+          <p:cNvSpPr>
+            <a:spLocks noGrp="1"/>
+          </p:cNvSpPr>
+          <p:nvPr>
+            <p:ph type="body" idx="1"/>
+          </p:nvPr>
+        </p:nvSpPr>
+        <p:spPr/>
+        <p:txBody>
+          <a:bodyPr/>
+          <a:lstStyle/>
+          <a:p>
+            <a:r>
+              <a:rPr lang="en-US" dirty="0"/>
+              <a:t/>
+            </a:r>
+            <a:endParaRPr lang="en-US" dirty="0"/>
+          </a:p>
+        </p:txBody>
+      </p:sp>
+      <p:sp>
+        <p:nvSpPr>
+          <p:cNvPr id="4" name="Slide Number Placeholder 3"/>
+          <p:cNvSpPr>
+            <a:spLocks noGrp="1"/>
+          </p:cNvSpPr>
+          <p:nvPr>
+            <p:ph type="sldNum" sz="quarter" idx="10"/>
+          </p:nvPr>
+        </p:nvSpPr>
+        <p:spPr/>
+        <p:txBody>
+          <a:bodyPr/>
+          <a:lstStyle/>
+          <a:p>
+            <a:fld id="{F7021451-1387-4CA6-816F-3879F97B5CBC}" type="slidenum">
+              <a:rPr lang="en-US"/>
+              <a:t>8</a:t>
+            </a:fld>
+            <a:endParaRPr lang="en-US"/>
+          </a:p>
+        </p:txBody>
+      </p:sp>
+    </p:spTree>
+    <p:extLst>
+      <p:ext uri="{BB962C8B-B14F-4D97-AF65-F5344CB8AC3E}">
+        <p14:creationId xmlns:p14="http://schemas.microsoft.com/office/powerpoint/2010/main" val="1024086991"/>
+      </p:ext>
+    </p:extLst>
+  </p:cSld>
+  <p:clrMapOvr>
+    <a:masterClrMapping/>
+  </p:clrMapOvr>
+</p:notes>
+</file>
+
+<file path=ppt/notesSlides/notesSlide9.xml><?xml version="1.0" encoding="utf-8"?>
+<p:notes xmlns:a="http://schemas.openxmlformats.org/drawingml/2006/main" xmlns:r="http://schemas.openxmlformats.org/officeDocument/2006/relationships" xmlns:p="http://schemas.openxmlformats.org/presentationml/2006/main">
+  <p:cSld>
+    <p:spTree>
+      <p:nvGrpSpPr>
+        <p:cNvPr id="1" name=""/>
+        <p:cNvGrpSpPr/>
+        <p:nvPr/>
+      </p:nvGrpSpPr>
+      <p:grpSpPr>
+        <a:xfrm>
+          <a:off x="0" y="0"/>
+          <a:ext cx="0" cy="0"/>
+          <a:chOff x="0" y="0"/>
+          <a:chExt cx="0" cy="0"/>
+        </a:xfrm>
+      </p:grpSpPr>
+      <p:sp>
+        <p:nvSpPr>
+          <p:cNvPr id="2" name="Slide Image Placeholder 1"/>
+          <p:cNvSpPr>
+            <a:spLocks noGrp="1" noRot="1" noChangeAspect="1"/>
+          </p:cNvSpPr>
+          <p:nvPr>
+            <p:ph type="sldImg"/>
+          </p:nvPr>
+        </p:nvSpPr>
+        <p:spPr/>
+      </p:sp>
+      <p:sp>
+        <p:nvSpPr>
+          <p:cNvPr id="3" name="Notes Placeholder 2"/>
+          <p:cNvSpPr>
+            <a:spLocks noGrp="1"/>
+          </p:cNvSpPr>
+          <p:nvPr>
+            <p:ph type="body" idx="1"/>
+          </p:nvPr>
+        </p:nvSpPr>
+        <p:spPr/>
+        <p:txBody>
+          <a:bodyPr/>
+          <a:lstStyle/>
+          <a:p>
+            <a:r>
+              <a:rPr lang="en-US" dirty="0"/>
+              <a:t/>
+            </a:r>
+            <a:endParaRPr lang="en-US" dirty="0"/>
+          </a:p>
+        </p:txBody>
+      </p:sp>
+      <p:sp>
+        <p:nvSpPr>
+          <p:cNvPr id="4" name="Slide Number Placeholder 3"/>
+          <p:cNvSpPr>
+            <a:spLocks noGrp="1"/>
+          </p:cNvSpPr>
+          <p:nvPr>
+            <p:ph type="sldNum" sz="quarter" idx="10"/>
+          </p:nvPr>
+        </p:nvSpPr>
+        <p:spPr/>
+        <p:txBody>
+          <a:bodyPr/>
+          <a:lstStyle/>
+          <a:p>
+            <a:fld id="{F7021451-1387-4CA6-816F-3879F97B5CBC}" type="slidenum">
+              <a:rPr lang="en-US"/>
+              <a:t>9</a:t>
             </a:fld>
             <a:endParaRPr lang="en-US"/>
           </a:p>
@@ -1124,7 +1658,7 @@
     <p:bg>
       <p:bgPr>
         <a:solidFill>
-          <a:srgbClr val="1F2937"/>
+          <a:srgbClr val="0F172A"/>
         </a:solidFill>
       </p:bgPr>
     </p:bg>
@@ -1144,23 +1678,39 @@
       </p:grpSpPr>
       <p:sp>
         <p:nvSpPr>
-          <p:cNvPr id="2" name="Shape 0"/>
-          <p:cNvSpPr/>
-          <p:nvPr/>
-        </p:nvSpPr>
-        <p:spPr>
-          <a:xfrm>
-            <a:off x="0" y="2743200"/>
-            <a:ext cx="12188952" cy="45720"/>
-          </a:xfrm>
-          <a:prstGeom prst="rect">
-            <a:avLst/>
-          </a:prstGeom>
-          <a:solidFill>
-            <a:srgbClr val="0EA5E9"/>
-          </a:solidFill>
-          <a:ln/>
-        </p:spPr>
+          <p:cNvPr id="2" name="Text 0"/>
+          <p:cNvSpPr/>
+          <p:nvPr/>
+        </p:nvSpPr>
+        <p:spPr>
+          <a:xfrm>
+            <a:off x="457200" y="1828800"/>
+            <a:ext cx="8229600" cy="1097280"/>
+          </a:xfrm>
+          <a:prstGeom prst="rect">
+            <a:avLst/>
+          </a:prstGeom>
+          <a:noFill/>
+          <a:ln/>
+        </p:spPr>
+        <p:txBody>
+          <a:bodyPr wrap="square" rtlCol="0" anchor="ctr"/>
+          <a:lstStyle/>
+          <a:p>
+            <a:pPr algn="ctr" indent="0" marL="0">
+              <a:buNone/>
+            </a:pPr>
+            <a:r>
+              <a:rPr lang="en-US" sz="3600" b="1" dirty="0">
+                <a:solidFill>
+                  <a:srgbClr val="FFFFFF"/>
+                </a:solidFill>
+              </a:rPr>
+              <a:t>Sales Performance Analysis</a:t>
+            </a:r>
+            <a:endParaRPr lang="en-US" sz="3600" dirty="0"/>
+          </a:p>
+        </p:txBody>
       </p:sp>
       <p:sp>
         <p:nvSpPr>
@@ -1170,8 +1720,8 @@
         </p:nvSpPr>
         <p:spPr>
           <a:xfrm>
-            <a:off x="731520" y="2286000"/>
-            <a:ext cx="10698480" cy="1005840"/>
+            <a:off x="457200" y="2834640"/>
+            <a:ext cx="8229600" cy="548640"/>
           </a:xfrm>
           <a:prstGeom prst="rect">
             <a:avLst/>
@@ -1183,21 +1733,18 @@
           <a:bodyPr wrap="square" rtlCol="0" anchor="ctr"/>
           <a:lstStyle/>
           <a:p>
-            <a:pPr indent="0" marL="0">
-              <a:buNone/>
-            </a:pPr>
-            <a:r>
-              <a:rPr lang="en-US" sz="3400" b="1" dirty="0">
-                <a:solidFill>
-                  <a:srgbClr val="FFFFFF"/>
-                </a:solidFill>
-                <a:latin typeface="Calibri" pitchFamily="34" charset="0"/>
-                <a:ea typeface="Calibri" pitchFamily="34" charset="-122"/>
-                <a:cs typeface="Calibri" pitchFamily="34" charset="-120"/>
-              </a:rPr>
-              <a:t>Sales Performance Analysis</a:t>
-            </a:r>
-            <a:endParaRPr lang="en-US" sz="3400" dirty="0"/>
+            <a:pPr algn="ctr" indent="0" marL="0">
+              <a:buNone/>
+            </a:pPr>
+            <a:r>
+              <a:rPr lang="en-US" sz="1800" dirty="0">
+                <a:solidFill>
+                  <a:srgbClr val="93C5FD"/>
+                </a:solidFill>
+              </a:rPr>
+              <a:t>Data Analysis &amp; Interactive Dashboard Project</a:t>
+            </a:r>
+            <a:endParaRPr lang="en-US" sz="1800" dirty="0"/>
           </a:p>
         </p:txBody>
       </p:sp>
@@ -1209,8 +1756,8 @@
         </p:nvSpPr>
         <p:spPr>
           <a:xfrm>
-            <a:off x="731520" y="3017520"/>
-            <a:ext cx="10698480" cy="457200"/>
+            <a:off x="457200" y="4480560"/>
+            <a:ext cx="8229600" cy="365760"/>
           </a:xfrm>
           <a:prstGeom prst="rect">
             <a:avLst/>
@@ -1222,93 +1769,18 @@
           <a:bodyPr wrap="square" rtlCol="0" anchor="ctr"/>
           <a:lstStyle/>
           <a:p>
-            <a:pPr indent="0" marL="0">
-              <a:buNone/>
-            </a:pPr>
-            <a:r>
-              <a:rPr lang="en-US" sz="1600" dirty="0">
-                <a:solidFill>
-                  <a:srgbClr val="93C5FD"/>
-                </a:solidFill>
-                <a:latin typeface="Calibri" pitchFamily="34" charset="0"/>
-                <a:ea typeface="Calibri" pitchFamily="34" charset="-122"/>
-                <a:cs typeface="Calibri" pitchFamily="34" charset="-120"/>
-              </a:rPr>
-              <a:t>Academic Project - March 2024</a:t>
-            </a:r>
-            <a:endParaRPr lang="en-US" sz="1600" dirty="0"/>
-          </a:p>
-        </p:txBody>
-      </p:sp>
-      <p:sp>
-        <p:nvSpPr>
-          <p:cNvPr id="5" name="Text 3"/>
-          <p:cNvSpPr/>
-          <p:nvPr/>
-        </p:nvSpPr>
-        <p:spPr>
-          <a:xfrm>
-            <a:off x="731520" y="5760720"/>
-            <a:ext cx="10698480" cy="457200"/>
-          </a:xfrm>
-          <a:prstGeom prst="rect">
-            <a:avLst/>
-          </a:prstGeom>
-          <a:noFill/>
-          <a:ln/>
-        </p:spPr>
-        <p:txBody>
-          <a:bodyPr wrap="square" rtlCol="0" anchor="ctr"/>
-          <a:lstStyle/>
-          <a:p>
-            <a:pPr indent="0" marL="0">
-              <a:buNone/>
-            </a:pPr>
-            <a:r>
-              <a:rPr lang="en-US" sz="1400" dirty="0">
-                <a:solidFill>
-                  <a:srgbClr val="D1D5DB"/>
-                </a:solidFill>
-              </a:rPr>
-              <a:t>Sazzadul Islam  |  Data Analyst - Data Engineer - Data Scientist</a:t>
-            </a:r>
-            <a:endParaRPr lang="en-US" sz="1400" dirty="0"/>
-          </a:p>
-        </p:txBody>
-      </p:sp>
-      <p:sp>
-        <p:nvSpPr>
-          <p:cNvPr id="6" name="Text 4"/>
-          <p:cNvSpPr/>
-          <p:nvPr/>
-        </p:nvSpPr>
-        <p:spPr>
-          <a:xfrm>
-            <a:off x="731520" y="6126480"/>
-            <a:ext cx="10698480" cy="365760"/>
-          </a:xfrm>
-          <a:prstGeom prst="rect">
-            <a:avLst/>
-          </a:prstGeom>
-          <a:noFill/>
-          <a:ln/>
-        </p:spPr>
-        <p:txBody>
-          <a:bodyPr wrap="square" rtlCol="0" anchor="ctr"/>
-          <a:lstStyle/>
-          <a:p>
-            <a:pPr indent="0" marL="0">
-              <a:buNone/>
-            </a:pPr>
-            <a:r>
-              <a:rPr lang="en-US" sz="1100" dirty="0">
-                <a:solidFill>
-                  <a:srgbClr val="9CA3AF"/>
-                </a:solidFill>
-              </a:rPr>
-              <a:t>sazzadulislam352@gmail.com   |   github.com/sazzadulislam352</a:t>
-            </a:r>
-            <a:endParaRPr lang="en-US" sz="1100" dirty="0"/>
+            <a:pPr algn="ctr" indent="0" marL="0">
+              <a:buNone/>
+            </a:pPr>
+            <a:r>
+              <a:rPr lang="en-US" sz="1200" dirty="0">
+                <a:solidFill>
+                  <a:srgbClr val="94A3B8"/>
+                </a:solidFill>
+              </a:rPr>
+              <a:t>Sazzadul Islam  |  DataInsight Portfolio</a:t>
+            </a:r>
+            <a:endParaRPr lang="en-US" sz="1200" dirty="0"/>
           </a:p>
         </p:txBody>
       </p:sp>
@@ -1320,16 +1792,9 @@
 </p:sld>
 </file>
 
-<file path=ppt/slides/slide2.xml><?xml version="1.0" encoding="utf-8"?>
+<file path=ppt/slides/slide10.xml><?xml version="1.0" encoding="utf-8"?>
 <p:sld xmlns:a="http://schemas.openxmlformats.org/drawingml/2006/main" xmlns:r="http://schemas.openxmlformats.org/officeDocument/2006/relationships" xmlns:p="http://schemas.openxmlformats.org/presentationml/2006/main">
-  <p:cSld name="Slide 2">
-    <p:bg>
-      <p:bgPr>
-        <a:solidFill>
-          <a:srgbClr val="FFFFFF"/>
-        </a:solidFill>
-      </p:bgPr>
-    </p:bg>
+  <p:cSld name="Slide 10">
     <p:spTree>
       <p:nvGrpSpPr>
         <p:cNvPr id="1" name=""/>
@@ -1346,23 +1811,39 @@
       </p:grpSpPr>
       <p:sp>
         <p:nvSpPr>
-          <p:cNvPr id="2" name="Shape 0"/>
-          <p:cNvSpPr/>
-          <p:nvPr/>
-        </p:nvSpPr>
-        <p:spPr>
-          <a:xfrm>
-            <a:off x="0" y="0"/>
-            <a:ext cx="12188952" cy="1051560"/>
-          </a:xfrm>
-          <a:prstGeom prst="rect">
-            <a:avLst/>
-          </a:prstGeom>
-          <a:solidFill>
-            <a:srgbClr val="1F2937"/>
-          </a:solidFill>
-          <a:ln/>
-        </p:spPr>
+          <p:cNvPr id="2" name="Text 0"/>
+          <p:cNvSpPr/>
+          <p:nvPr/>
+        </p:nvSpPr>
+        <p:spPr>
+          <a:xfrm>
+            <a:off x="457200" y="320040"/>
+            <a:ext cx="8229600" cy="548640"/>
+          </a:xfrm>
+          <a:prstGeom prst="rect">
+            <a:avLst/>
+          </a:prstGeom>
+          <a:noFill/>
+          <a:ln/>
+        </p:spPr>
+        <p:txBody>
+          <a:bodyPr wrap="square" rtlCol="0" anchor="ctr"/>
+          <a:lstStyle/>
+          <a:p>
+            <a:pPr indent="0" marL="0">
+              <a:buNone/>
+            </a:pPr>
+            <a:r>
+              <a:rPr lang="en-US" sz="2600" b="1" dirty="0">
+                <a:solidFill>
+                  <a:srgbClr val="2E5BFF"/>
+                </a:solidFill>
+              </a:rPr>
+              <a:t>Insights &amp; Conclusion</a:t>
+            </a:r>
+            <a:endParaRPr lang="en-US" sz="2600" dirty="0"/>
+          </a:p>
+        </p:txBody>
       </p:sp>
       <p:sp>
         <p:nvSpPr>
@@ -1372,8 +1853,8 @@
         </p:nvSpPr>
         <p:spPr>
           <a:xfrm>
-            <a:off x="457200" y="164592"/>
-            <a:ext cx="11247120" cy="731520"/>
+            <a:off x="457200" y="1188720"/>
+            <a:ext cx="8229600" cy="1828800"/>
           </a:xfrm>
           <a:prstGeom prst="rect">
             <a:avLst/>
@@ -1382,627 +1863,57 @@
           <a:ln/>
         </p:spPr>
         <p:txBody>
+          <a:bodyPr wrap="square" rtlCol="0" anchor="t"/>
+          <a:lstStyle/>
+          <a:p>
+            <a:pPr indent="0" marL="0">
+              <a:buNone/>
+            </a:pPr>
+            <a:r>
+              <a:rPr lang="en-US" sz="1900" dirty="0">
+                <a:solidFill>
+                  <a:srgbClr val="333333"/>
+                </a:solidFill>
+              </a:rPr>
+              <a:t>A small group of top reps generate a majority of revenue; automating the reporting pipeline reduced reporting time by 40%, enabling weekly instead of monthly reviews.</a:t>
+            </a:r>
+            <a:endParaRPr lang="en-US" sz="1900" dirty="0"/>
+          </a:p>
+        </p:txBody>
+      </p:sp>
+      <p:sp>
+        <p:nvSpPr>
+          <p:cNvPr id="4" name="Text 2"/>
+          <p:cNvSpPr/>
+          <p:nvPr/>
+        </p:nvSpPr>
+        <p:spPr>
+          <a:xfrm>
+            <a:off x="457200" y="4572000"/>
+            <a:ext cx="8229600" cy="365760"/>
+          </a:xfrm>
+          <a:prstGeom prst="rect">
+            <a:avLst/>
+          </a:prstGeom>
+          <a:noFill/>
+          <a:ln/>
+        </p:spPr>
+        <p:txBody>
           <a:bodyPr wrap="square" rtlCol="0" anchor="ctr"/>
           <a:lstStyle/>
           <a:p>
-            <a:pPr indent="0" marL="0">
-              <a:buNone/>
-            </a:pPr>
-            <a:r>
-              <a:rPr lang="en-US" sz="2800" b="1" dirty="0">
-                <a:solidFill>
-                  <a:srgbClr val="FFFFFF"/>
-                </a:solidFill>
-                <a:latin typeface="Calibri" pitchFamily="34" charset="0"/>
-                <a:ea typeface="Calibri" pitchFamily="34" charset="-122"/>
-                <a:cs typeface="Calibri" pitchFamily="34" charset="-120"/>
-              </a:rPr>
-              <a:t>Sales Performance Analysis</a:t>
-            </a:r>
-            <a:endParaRPr lang="en-US" sz="2800" dirty="0"/>
-          </a:p>
-        </p:txBody>
-      </p:sp>
-      <p:sp>
-        <p:nvSpPr>
-          <p:cNvPr id="4" name="Text 2"/>
-          <p:cNvSpPr/>
-          <p:nvPr/>
-        </p:nvSpPr>
-        <p:spPr>
-          <a:xfrm>
-            <a:off x="457200" y="1188720"/>
-            <a:ext cx="11247120" cy="365760"/>
-          </a:xfrm>
-          <a:prstGeom prst="rect">
-            <a:avLst/>
-          </a:prstGeom>
-          <a:noFill/>
-          <a:ln/>
-        </p:spPr>
-        <p:txBody>
-          <a:bodyPr wrap="square" rtlCol="0" anchor="ctr"/>
-          <a:lstStyle/>
-          <a:p>
-            <a:pPr indent="0" marL="0">
-              <a:buNone/>
-            </a:pPr>
-            <a:r>
-              <a:rPr lang="en-US" sz="1500" i="1" dirty="0">
-                <a:solidFill>
-                  <a:srgbClr val="4B5563"/>
-                </a:solidFill>
-                <a:latin typeface="Calibri" pitchFamily="34" charset="0"/>
-                <a:ea typeface="Calibri" pitchFamily="34" charset="-122"/>
-                <a:cs typeface="Calibri" pitchFamily="34" charset="-120"/>
-              </a:rPr>
-              <a:t>Academic Project - March 2024</a:t>
-            </a:r>
-            <a:endParaRPr lang="en-US" sz="1500" dirty="0"/>
-          </a:p>
-        </p:txBody>
-      </p:sp>
-      <p:sp>
-        <p:nvSpPr>
-          <p:cNvPr id="5" name="Shape 3"/>
-          <p:cNvSpPr/>
-          <p:nvPr/>
-        </p:nvSpPr>
-        <p:spPr>
-          <a:xfrm>
-            <a:off x="548640" y="1828800"/>
-            <a:ext cx="73152" cy="777240"/>
-          </a:xfrm>
-          <a:prstGeom prst="rect">
-            <a:avLst/>
-          </a:prstGeom>
-          <a:solidFill>
-            <a:srgbClr val="0EA5E9"/>
-          </a:solidFill>
-          <a:ln/>
-        </p:spPr>
-      </p:sp>
-      <p:sp>
-        <p:nvSpPr>
-          <p:cNvPr id="6" name="Text 4"/>
-          <p:cNvSpPr/>
-          <p:nvPr/>
-        </p:nvSpPr>
-        <p:spPr>
-          <a:xfrm>
-            <a:off x="777240" y="1783080"/>
-            <a:ext cx="1828800" cy="365760"/>
-          </a:xfrm>
-          <a:prstGeom prst="rect">
-            <a:avLst/>
-          </a:prstGeom>
-          <a:noFill/>
-          <a:ln/>
-        </p:spPr>
-        <p:txBody>
-          <a:bodyPr wrap="square" rtlCol="0" anchor="ctr"/>
-          <a:lstStyle/>
-          <a:p>
-            <a:pPr indent="0" marL="0">
-              <a:buNone/>
-            </a:pPr>
-            <a:r>
-              <a:rPr lang="en-US" sz="1500" b="1" dirty="0">
-                <a:solidFill>
-                  <a:srgbClr val="1F2937"/>
-                </a:solidFill>
-              </a:rPr>
-              <a:t>Goal</a:t>
-            </a:r>
-            <a:endParaRPr lang="en-US" sz="1500" dirty="0"/>
-          </a:p>
-        </p:txBody>
-      </p:sp>
-      <p:sp>
-        <p:nvSpPr>
-          <p:cNvPr id="7" name="Text 5"/>
-          <p:cNvSpPr/>
-          <p:nvPr/>
-        </p:nvSpPr>
-        <p:spPr>
-          <a:xfrm>
-            <a:off x="777240" y="2148840"/>
-            <a:ext cx="10698480" cy="548640"/>
-          </a:xfrm>
-          <a:prstGeom prst="rect">
-            <a:avLst/>
-          </a:prstGeom>
-          <a:noFill/>
-          <a:ln/>
-        </p:spPr>
-        <p:txBody>
-          <a:bodyPr wrap="square" rtlCol="0" anchor="ctr"/>
-          <a:lstStyle/>
-          <a:p>
-            <a:pPr indent="0" marL="0">
-              <a:buNone/>
-            </a:pPr>
-            <a:r>
-              <a:rPr lang="en-US" sz="1300" dirty="0">
-                <a:solidFill>
-                  <a:srgbClr val="4B5563"/>
-                </a:solidFill>
-              </a:rPr>
-              <a:t>Speed up sales performance reporting for a large customer base.</a:t>
-            </a:r>
-            <a:endParaRPr lang="en-US" sz="1300" dirty="0"/>
-          </a:p>
-        </p:txBody>
-      </p:sp>
-      <p:sp>
-        <p:nvSpPr>
-          <p:cNvPr id="8" name="Shape 6"/>
-          <p:cNvSpPr/>
-          <p:nvPr/>
-        </p:nvSpPr>
-        <p:spPr>
-          <a:xfrm>
-            <a:off x="548640" y="2880360"/>
-            <a:ext cx="73152" cy="777240"/>
-          </a:xfrm>
-          <a:prstGeom prst="rect">
-            <a:avLst/>
-          </a:prstGeom>
-          <a:solidFill>
-            <a:srgbClr val="0EA5E9"/>
-          </a:solidFill>
-          <a:ln/>
-        </p:spPr>
-      </p:sp>
-      <p:sp>
-        <p:nvSpPr>
-          <p:cNvPr id="9" name="Text 7"/>
-          <p:cNvSpPr/>
-          <p:nvPr/>
-        </p:nvSpPr>
-        <p:spPr>
-          <a:xfrm>
-            <a:off x="777240" y="2834640"/>
-            <a:ext cx="1828800" cy="365760"/>
-          </a:xfrm>
-          <a:prstGeom prst="rect">
-            <a:avLst/>
-          </a:prstGeom>
-          <a:noFill/>
-          <a:ln/>
-        </p:spPr>
-        <p:txBody>
-          <a:bodyPr wrap="square" rtlCol="0" anchor="ctr"/>
-          <a:lstStyle/>
-          <a:p>
-            <a:pPr indent="0" marL="0">
-              <a:buNone/>
-            </a:pPr>
-            <a:r>
-              <a:rPr lang="en-US" sz="1500" b="1" dirty="0">
-                <a:solidFill>
-                  <a:srgbClr val="1F2937"/>
-                </a:solidFill>
-              </a:rPr>
-              <a:t>Approach</a:t>
-            </a:r>
-            <a:endParaRPr lang="en-US" sz="1500" dirty="0"/>
-          </a:p>
-        </p:txBody>
-      </p:sp>
-      <p:sp>
-        <p:nvSpPr>
-          <p:cNvPr id="10" name="Text 8"/>
-          <p:cNvSpPr/>
-          <p:nvPr/>
-        </p:nvSpPr>
-        <p:spPr>
-          <a:xfrm>
-            <a:off x="777240" y="3200400"/>
-            <a:ext cx="10698480" cy="548640"/>
-          </a:xfrm>
-          <a:prstGeom prst="rect">
-            <a:avLst/>
-          </a:prstGeom>
-          <a:noFill/>
-          <a:ln/>
-        </p:spPr>
-        <p:txBody>
-          <a:bodyPr wrap="square" rtlCol="0" anchor="ctr"/>
-          <a:lstStyle/>
-          <a:p>
-            <a:pPr indent="0" marL="0">
-              <a:buNone/>
-            </a:pPr>
-            <a:r>
-              <a:rPr lang="en-US" sz="1300" dirty="0">
-                <a:solidFill>
-                  <a:srgbClr val="4B5563"/>
-                </a:solidFill>
-              </a:rPr>
-              <a:t>Combined Excel, SQL, and Tableau to analyze a 50,000-record sales dataset, building a repeatable reporting workflow.</a:t>
-            </a:r>
-            <a:endParaRPr lang="en-US" sz="1300" dirty="0"/>
-          </a:p>
-        </p:txBody>
-      </p:sp>
-      <p:sp>
-        <p:nvSpPr>
-          <p:cNvPr id="11" name="Shape 9"/>
-          <p:cNvSpPr/>
-          <p:nvPr/>
-        </p:nvSpPr>
-        <p:spPr>
-          <a:xfrm>
-            <a:off x="548640" y="3931920"/>
-            <a:ext cx="73152" cy="777240"/>
-          </a:xfrm>
-          <a:prstGeom prst="rect">
-            <a:avLst/>
-          </a:prstGeom>
-          <a:solidFill>
-            <a:srgbClr val="0EA5E9"/>
-          </a:solidFill>
-          <a:ln/>
-        </p:spPr>
-      </p:sp>
-      <p:sp>
-        <p:nvSpPr>
-          <p:cNvPr id="12" name="Text 10"/>
-          <p:cNvSpPr/>
-          <p:nvPr/>
-        </p:nvSpPr>
-        <p:spPr>
-          <a:xfrm>
-            <a:off x="777240" y="3886200"/>
-            <a:ext cx="1828800" cy="365760"/>
-          </a:xfrm>
-          <a:prstGeom prst="rect">
-            <a:avLst/>
-          </a:prstGeom>
-          <a:noFill/>
-          <a:ln/>
-        </p:spPr>
-        <p:txBody>
-          <a:bodyPr wrap="square" rtlCol="0" anchor="ctr"/>
-          <a:lstStyle/>
-          <a:p>
-            <a:pPr indent="0" marL="0">
-              <a:buNone/>
-            </a:pPr>
-            <a:r>
-              <a:rPr lang="en-US" sz="1500" b="1" dirty="0">
-                <a:solidFill>
-                  <a:srgbClr val="1F2937"/>
-                </a:solidFill>
-              </a:rPr>
-              <a:t>Result</a:t>
-            </a:r>
-            <a:endParaRPr lang="en-US" sz="1500" dirty="0"/>
-          </a:p>
-        </p:txBody>
-      </p:sp>
-      <p:sp>
-        <p:nvSpPr>
-          <p:cNvPr id="13" name="Text 11"/>
-          <p:cNvSpPr/>
-          <p:nvPr/>
-        </p:nvSpPr>
-        <p:spPr>
-          <a:xfrm>
-            <a:off x="777240" y="4251960"/>
-            <a:ext cx="10698480" cy="548640"/>
-          </a:xfrm>
-          <a:prstGeom prst="rect">
-            <a:avLst/>
-          </a:prstGeom>
-          <a:noFill/>
-          <a:ln/>
-        </p:spPr>
-        <p:txBody>
-          <a:bodyPr wrap="square" rtlCol="0" anchor="ctr"/>
-          <a:lstStyle/>
-          <a:p>
-            <a:pPr indent="0" marL="0">
-              <a:buNone/>
-            </a:pPr>
-            <a:r>
-              <a:rPr lang="en-US" sz="1300" dirty="0">
-                <a:solidFill>
-                  <a:srgbClr val="4B5563"/>
-                </a:solidFill>
-              </a:rPr>
-              <a:t>Enabled 40% faster sales performance reporting.</a:t>
-            </a:r>
-            <a:endParaRPr lang="en-US" sz="1300" dirty="0"/>
-          </a:p>
-        </p:txBody>
-      </p:sp>
-      <p:sp>
-        <p:nvSpPr>
-          <p:cNvPr id="14" name="Text 12"/>
-          <p:cNvSpPr/>
-          <p:nvPr/>
-        </p:nvSpPr>
-        <p:spPr>
-          <a:xfrm>
-            <a:off x="548640" y="5074920"/>
-            <a:ext cx="2011680" cy="365760"/>
-          </a:xfrm>
-          <a:prstGeom prst="rect">
-            <a:avLst/>
-          </a:prstGeom>
-          <a:noFill/>
-          <a:ln/>
-        </p:spPr>
-        <p:txBody>
-          <a:bodyPr wrap="square" rtlCol="0" anchor="ctr"/>
-          <a:lstStyle/>
-          <a:p>
-            <a:pPr indent="0" marL="0">
-              <a:buNone/>
-            </a:pPr>
-            <a:r>
-              <a:rPr lang="en-US" sz="1300" b="1" dirty="0">
-                <a:solidFill>
-                  <a:srgbClr val="1F2937"/>
-                </a:solidFill>
-              </a:rPr>
-              <a:t>Tech / Skills:</a:t>
-            </a:r>
-            <a:endParaRPr lang="en-US" sz="1300" dirty="0"/>
-          </a:p>
-        </p:txBody>
-      </p:sp>
-      <p:sp>
-        <p:nvSpPr>
-          <p:cNvPr id="15" name="Shape 13"/>
-          <p:cNvSpPr/>
-          <p:nvPr/>
-        </p:nvSpPr>
-        <p:spPr>
-          <a:xfrm>
-            <a:off x="2377440" y="5120640"/>
-            <a:ext cx="731520" cy="365760"/>
-          </a:xfrm>
-          <a:prstGeom prst="roundRect">
-            <a:avLst>
-              <a:gd name="adj" fmla="val 20000"/>
-            </a:avLst>
-          </a:prstGeom>
-          <a:solidFill>
-            <a:srgbClr val="E0F2FE"/>
-          </a:solidFill>
-          <a:ln w="9525">
-            <a:solidFill>
-              <a:srgbClr val="0EA5E9"/>
-            </a:solidFill>
-            <a:prstDash val="solid"/>
-          </a:ln>
-        </p:spPr>
-      </p:sp>
-      <p:sp>
-        <p:nvSpPr>
-          <p:cNvPr id="16" name="Text 14"/>
-          <p:cNvSpPr/>
-          <p:nvPr/>
-        </p:nvSpPr>
-        <p:spPr>
-          <a:xfrm>
-            <a:off x="2377440" y="5120640"/>
-            <a:ext cx="731520" cy="365760"/>
-          </a:xfrm>
-          <a:prstGeom prst="rect">
-            <a:avLst/>
-          </a:prstGeom>
-          <a:noFill/>
-          <a:ln/>
-        </p:spPr>
-        <p:txBody>
-          <a:bodyPr wrap="square" rtlCol="0" anchor="ctr"/>
-          <a:lstStyle/>
-          <a:p>
             <a:pPr algn="ctr" indent="0" marL="0">
               <a:buNone/>
             </a:pPr>
             <a:r>
-              <a:rPr lang="en-US" sz="1100" b="1" dirty="0">
-                <a:solidFill>
-                  <a:srgbClr val="075985"/>
-                </a:solidFill>
-              </a:rPr>
-              <a:t>Excel</a:t>
-            </a:r>
-            <a:endParaRPr lang="en-US" sz="1100" dirty="0"/>
-          </a:p>
-        </p:txBody>
-      </p:sp>
-      <p:sp>
-        <p:nvSpPr>
-          <p:cNvPr id="17" name="Shape 15"/>
-          <p:cNvSpPr/>
-          <p:nvPr/>
-        </p:nvSpPr>
-        <p:spPr>
-          <a:xfrm>
-            <a:off x="3246120" y="5120640"/>
-            <a:ext cx="566928" cy="365760"/>
-          </a:xfrm>
-          <a:prstGeom prst="roundRect">
-            <a:avLst>
-              <a:gd name="adj" fmla="val 20000"/>
-            </a:avLst>
-          </a:prstGeom>
-          <a:solidFill>
-            <a:srgbClr val="E0F2FE"/>
-          </a:solidFill>
-          <a:ln w="9525">
-            <a:solidFill>
-              <a:srgbClr val="0EA5E9"/>
-            </a:solidFill>
-            <a:prstDash val="solid"/>
-          </a:ln>
-        </p:spPr>
-      </p:sp>
-      <p:sp>
-        <p:nvSpPr>
-          <p:cNvPr id="18" name="Text 16"/>
-          <p:cNvSpPr/>
-          <p:nvPr/>
-        </p:nvSpPr>
-        <p:spPr>
-          <a:xfrm>
-            <a:off x="3246120" y="5120640"/>
-            <a:ext cx="566928" cy="365760"/>
-          </a:xfrm>
-          <a:prstGeom prst="rect">
-            <a:avLst/>
-          </a:prstGeom>
-          <a:noFill/>
-          <a:ln/>
-        </p:spPr>
-        <p:txBody>
-          <a:bodyPr wrap="square" rtlCol="0" anchor="ctr"/>
-          <a:lstStyle/>
-          <a:p>
-            <a:pPr algn="ctr" indent="0" marL="0">
-              <a:buNone/>
-            </a:pPr>
-            <a:r>
-              <a:rPr lang="en-US" sz="1100" b="1" dirty="0">
-                <a:solidFill>
-                  <a:srgbClr val="075985"/>
-                </a:solidFill>
-              </a:rPr>
-              <a:t>SQL</a:t>
-            </a:r>
-            <a:endParaRPr lang="en-US" sz="1100" dirty="0"/>
-          </a:p>
-        </p:txBody>
-      </p:sp>
-      <p:sp>
-        <p:nvSpPr>
-          <p:cNvPr id="19" name="Shape 17"/>
-          <p:cNvSpPr/>
-          <p:nvPr/>
-        </p:nvSpPr>
-        <p:spPr>
-          <a:xfrm>
-            <a:off x="3950208" y="5120640"/>
-            <a:ext cx="896112" cy="365760"/>
-          </a:xfrm>
-          <a:prstGeom prst="roundRect">
-            <a:avLst>
-              <a:gd name="adj" fmla="val 20000"/>
-            </a:avLst>
-          </a:prstGeom>
-          <a:solidFill>
-            <a:srgbClr val="E0F2FE"/>
-          </a:solidFill>
-          <a:ln w="9525">
-            <a:solidFill>
-              <a:srgbClr val="0EA5E9"/>
-            </a:solidFill>
-            <a:prstDash val="solid"/>
-          </a:ln>
-        </p:spPr>
-      </p:sp>
-      <p:sp>
-        <p:nvSpPr>
-          <p:cNvPr id="20" name="Text 18"/>
-          <p:cNvSpPr/>
-          <p:nvPr/>
-        </p:nvSpPr>
-        <p:spPr>
-          <a:xfrm>
-            <a:off x="3950208" y="5120640"/>
-            <a:ext cx="896112" cy="365760"/>
-          </a:xfrm>
-          <a:prstGeom prst="rect">
-            <a:avLst/>
-          </a:prstGeom>
-          <a:noFill/>
-          <a:ln/>
-        </p:spPr>
-        <p:txBody>
-          <a:bodyPr wrap="square" rtlCol="0" anchor="ctr"/>
-          <a:lstStyle/>
-          <a:p>
-            <a:pPr algn="ctr" indent="0" marL="0">
-              <a:buNone/>
-            </a:pPr>
-            <a:r>
-              <a:rPr lang="en-US" sz="1100" b="1" dirty="0">
-                <a:solidFill>
-                  <a:srgbClr val="075985"/>
-                </a:solidFill>
-              </a:rPr>
-              <a:t>Tableau</a:t>
-            </a:r>
-            <a:endParaRPr lang="en-US" sz="1100" dirty="0"/>
-          </a:p>
-        </p:txBody>
-      </p:sp>
-      <p:sp>
-        <p:nvSpPr>
-          <p:cNvPr id="21" name="Shape 19"/>
-          <p:cNvSpPr/>
-          <p:nvPr/>
-        </p:nvSpPr>
-        <p:spPr>
-          <a:xfrm>
-            <a:off x="4983480" y="5120640"/>
-            <a:ext cx="1554480" cy="365760"/>
-          </a:xfrm>
-          <a:prstGeom prst="roundRect">
-            <a:avLst>
-              <a:gd name="adj" fmla="val 20000"/>
-            </a:avLst>
-          </a:prstGeom>
-          <a:solidFill>
-            <a:srgbClr val="E0F2FE"/>
-          </a:solidFill>
-          <a:ln w="9525">
-            <a:solidFill>
-              <a:srgbClr val="0EA5E9"/>
-            </a:solidFill>
-            <a:prstDash val="solid"/>
-          </a:ln>
-        </p:spPr>
-      </p:sp>
-      <p:sp>
-        <p:nvSpPr>
-          <p:cNvPr id="22" name="Text 20"/>
-          <p:cNvSpPr/>
-          <p:nvPr/>
-        </p:nvSpPr>
-        <p:spPr>
-          <a:xfrm>
-            <a:off x="4983480" y="5120640"/>
-            <a:ext cx="1554480" cy="365760"/>
-          </a:xfrm>
-          <a:prstGeom prst="rect">
-            <a:avLst/>
-          </a:prstGeom>
-          <a:noFill/>
-          <a:ln/>
-        </p:spPr>
-        <p:txBody>
-          <a:bodyPr wrap="square" rtlCol="0" anchor="ctr"/>
-          <a:lstStyle/>
-          <a:p>
-            <a:pPr algn="ctr" indent="0" marL="0">
-              <a:buNone/>
-            </a:pPr>
-            <a:r>
-              <a:rPr lang="en-US" sz="1100" b="1" dirty="0">
-                <a:solidFill>
-                  <a:srgbClr val="075985"/>
-                </a:solidFill>
-              </a:rPr>
-              <a:t>Sales Analytics</a:t>
-            </a:r>
-            <a:endParaRPr lang="en-US" sz="1100" dirty="0"/>
+              <a:rPr lang="en-US" sz="1200" dirty="0">
+                <a:solidFill>
+                  <a:srgbClr val="888888"/>
+                </a:solidFill>
+              </a:rPr>
+              <a:t>sazzadulislam352.github.io/sazzadul-islam-portfolio</a:t>
+            </a:r>
+            <a:endParaRPr lang="en-US" sz="1200" dirty="0"/>
           </a:p>
         </p:txBody>
       </p:sp>
@@ -2014,16 +1925,9 @@
 </p:sld>
 </file>
 
-<file path=ppt/slides/slide3.xml><?xml version="1.0" encoding="utf-8"?>
+<file path=ppt/slides/slide2.xml><?xml version="1.0" encoding="utf-8"?>
 <p:sld xmlns:a="http://schemas.openxmlformats.org/drawingml/2006/main" xmlns:r="http://schemas.openxmlformats.org/officeDocument/2006/relationships" xmlns:p="http://schemas.openxmlformats.org/presentationml/2006/main">
-  <p:cSld name="Slide 3">
-    <p:bg>
-      <p:bgPr>
-        <a:solidFill>
-          <a:srgbClr val="FFFFFF"/>
-        </a:solidFill>
-      </p:bgPr>
-    </p:bg>
+  <p:cSld name="Slide 2">
     <p:spTree>
       <p:nvGrpSpPr>
         <p:cNvPr id="1" name=""/>
@@ -2040,23 +1944,39 @@
       </p:grpSpPr>
       <p:sp>
         <p:nvSpPr>
-          <p:cNvPr id="2" name="Shape 0"/>
-          <p:cNvSpPr/>
-          <p:nvPr/>
-        </p:nvSpPr>
-        <p:spPr>
-          <a:xfrm>
-            <a:off x="0" y="0"/>
-            <a:ext cx="12188952" cy="1051560"/>
-          </a:xfrm>
-          <a:prstGeom prst="rect">
-            <a:avLst/>
-          </a:prstGeom>
-          <a:solidFill>
-            <a:srgbClr val="1F2937"/>
-          </a:solidFill>
-          <a:ln/>
-        </p:spPr>
+          <p:cNvPr id="2" name="Text 0"/>
+          <p:cNvSpPr/>
+          <p:nvPr/>
+        </p:nvSpPr>
+        <p:spPr>
+          <a:xfrm>
+            <a:off x="457200" y="320040"/>
+            <a:ext cx="8229600" cy="548640"/>
+          </a:xfrm>
+          <a:prstGeom prst="rect">
+            <a:avLst/>
+          </a:prstGeom>
+          <a:noFill/>
+          <a:ln/>
+        </p:spPr>
+        <p:txBody>
+          <a:bodyPr wrap="square" rtlCol="0" anchor="ctr"/>
+          <a:lstStyle/>
+          <a:p>
+            <a:pPr indent="0" marL="0">
+              <a:buNone/>
+            </a:pPr>
+            <a:r>
+              <a:rPr lang="en-US" sz="2600" b="1" dirty="0">
+                <a:solidFill>
+                  <a:srgbClr val="2E5BFF"/>
+                </a:solidFill>
+              </a:rPr>
+              <a:t>Project Objective</a:t>
+            </a:r>
+            <a:endParaRPr lang="en-US" sz="2600" dirty="0"/>
+          </a:p>
+        </p:txBody>
       </p:sp>
       <p:sp>
         <p:nvSpPr>
@@ -2066,8 +1986,8 @@
         </p:nvSpPr>
         <p:spPr>
           <a:xfrm>
-            <a:off x="457200" y="164592"/>
-            <a:ext cx="11247120" cy="731520"/>
+            <a:off x="457200" y="1188720"/>
+            <a:ext cx="8229600" cy="1828800"/>
           </a:xfrm>
           <a:prstGeom prst="rect">
             <a:avLst/>
@@ -2076,531 +1996,21 @@
           <a:ln/>
         </p:spPr>
         <p:txBody>
-          <a:bodyPr wrap="square" rtlCol="0" anchor="ctr"/>
+          <a:bodyPr wrap="square" rtlCol="0" anchor="t"/>
           <a:lstStyle/>
           <a:p>
             <a:pPr indent="0" marL="0">
               <a:buNone/>
             </a:pPr>
             <a:r>
-              <a:rPr lang="en-US" sz="2800" b="1" dirty="0">
-                <a:solidFill>
-                  <a:srgbClr val="FFFFFF"/>
-                </a:solidFill>
-                <a:latin typeface="Calibri" pitchFamily="34" charset="0"/>
-                <a:ea typeface="Calibri" pitchFamily="34" charset="-122"/>
-                <a:cs typeface="Calibri" pitchFamily="34" charset="-120"/>
-              </a:rPr>
-              <a:t>Sales Performance Analysis - Dashboard KPIs</a:t>
-            </a:r>
-            <a:endParaRPr lang="en-US" sz="2800" dirty="0"/>
-          </a:p>
-        </p:txBody>
-      </p:sp>
-      <p:sp>
-        <p:nvSpPr>
-          <p:cNvPr id="4" name="Text 2"/>
-          <p:cNvSpPr/>
-          <p:nvPr/>
-        </p:nvSpPr>
-        <p:spPr>
-          <a:xfrm>
-            <a:off x="457200" y="1188720"/>
-            <a:ext cx="11247120" cy="365760"/>
-          </a:xfrm>
-          <a:prstGeom prst="rect">
-            <a:avLst/>
-          </a:prstGeom>
-          <a:noFill/>
-          <a:ln/>
-        </p:spPr>
-        <p:txBody>
-          <a:bodyPr wrap="square" rtlCol="0" anchor="ctr"/>
-          <a:lstStyle/>
-          <a:p>
-            <a:pPr indent="0" marL="0">
-              <a:buNone/>
-            </a:pPr>
-            <a:r>
-              <a:rPr lang="en-US" sz="1500" i="1" dirty="0">
-                <a:solidFill>
-                  <a:srgbClr val="4B5563"/>
-                </a:solidFill>
-                <a:latin typeface="Calibri" pitchFamily="34" charset="0"/>
-                <a:ea typeface="Calibri" pitchFamily="34" charset="-122"/>
-                <a:cs typeface="Calibri" pitchFamily="34" charset="-120"/>
-              </a:rPr>
-              <a:t>Sample dataset (260 sales records / 10 reps) built to demonstrate the workflow</a:t>
-            </a:r>
-            <a:endParaRPr lang="en-US" sz="1500" dirty="0"/>
-          </a:p>
-        </p:txBody>
-      </p:sp>
-      <p:sp>
-        <p:nvSpPr>
-          <p:cNvPr id="5" name="Shape 3"/>
-          <p:cNvSpPr/>
-          <p:nvPr/>
-        </p:nvSpPr>
-        <p:spPr>
-          <a:xfrm>
-            <a:off x="548640" y="2011680"/>
-            <a:ext cx="2514600" cy="1371600"/>
-          </a:xfrm>
-          <a:prstGeom prst="roundRect">
-            <a:avLst>
-              <a:gd name="adj" fmla="val 5333"/>
-            </a:avLst>
-          </a:prstGeom>
-          <a:solidFill>
-            <a:srgbClr val="F8FAFC"/>
-          </a:solidFill>
-          <a:ln w="12700">
-            <a:solidFill>
-              <a:srgbClr val="CBD5E1"/>
-            </a:solidFill>
-            <a:prstDash val="solid"/>
-          </a:ln>
-        </p:spPr>
-      </p:sp>
-      <p:sp>
-        <p:nvSpPr>
-          <p:cNvPr id="6" name="Text 4"/>
-          <p:cNvSpPr/>
-          <p:nvPr/>
-        </p:nvSpPr>
-        <p:spPr>
-          <a:xfrm>
-            <a:off x="548640" y="2148840"/>
-            <a:ext cx="2514600" cy="594360"/>
-          </a:xfrm>
-          <a:prstGeom prst="rect">
-            <a:avLst/>
-          </a:prstGeom>
-          <a:noFill/>
-          <a:ln/>
-        </p:spPr>
-        <p:txBody>
-          <a:bodyPr wrap="square" rtlCol="0" anchor="ctr"/>
-          <a:lstStyle/>
-          <a:p>
-            <a:pPr algn="ctr" indent="0" marL="0">
-              <a:buNone/>
-            </a:pPr>
-            <a:r>
-              <a:rPr lang="en-US" sz="2400" b="1" dirty="0">
-                <a:solidFill>
-                  <a:srgbClr val="0EA5E9"/>
-                </a:solidFill>
-              </a:rPr>
-              <a:t>260</a:t>
-            </a:r>
-            <a:endParaRPr lang="en-US" sz="2400" dirty="0"/>
-          </a:p>
-        </p:txBody>
-      </p:sp>
-      <p:sp>
-        <p:nvSpPr>
-          <p:cNvPr id="7" name="Text 5"/>
-          <p:cNvSpPr/>
-          <p:nvPr/>
-        </p:nvSpPr>
-        <p:spPr>
-          <a:xfrm>
-            <a:off x="640080" y="2788920"/>
-            <a:ext cx="2331720" cy="502920"/>
-          </a:xfrm>
-          <a:prstGeom prst="rect">
-            <a:avLst/>
-          </a:prstGeom>
-          <a:noFill/>
-          <a:ln/>
-        </p:spPr>
-        <p:txBody>
-          <a:bodyPr wrap="square" rtlCol="0" anchor="ctr"/>
-          <a:lstStyle/>
-          <a:p>
-            <a:pPr algn="ctr" indent="0" marL="0">
-              <a:buNone/>
-            </a:pPr>
-            <a:r>
-              <a:rPr lang="en-US" sz="1100" dirty="0">
-                <a:solidFill>
-                  <a:srgbClr val="4B5563"/>
-                </a:solidFill>
-              </a:rPr>
-              <a:t>Sales Recorded</a:t>
-            </a:r>
-            <a:endParaRPr lang="en-US" sz="1100" dirty="0"/>
-          </a:p>
-        </p:txBody>
-      </p:sp>
-      <p:sp>
-        <p:nvSpPr>
-          <p:cNvPr id="8" name="Shape 6"/>
-          <p:cNvSpPr/>
-          <p:nvPr/>
-        </p:nvSpPr>
-        <p:spPr>
-          <a:xfrm>
-            <a:off x="3337560" y="2011680"/>
-            <a:ext cx="2514600" cy="1371600"/>
-          </a:xfrm>
-          <a:prstGeom prst="roundRect">
-            <a:avLst>
-              <a:gd name="adj" fmla="val 5333"/>
-            </a:avLst>
-          </a:prstGeom>
-          <a:solidFill>
-            <a:srgbClr val="F8FAFC"/>
-          </a:solidFill>
-          <a:ln w="12700">
-            <a:solidFill>
-              <a:srgbClr val="CBD5E1"/>
-            </a:solidFill>
-            <a:prstDash val="solid"/>
-          </a:ln>
-        </p:spPr>
-      </p:sp>
-      <p:sp>
-        <p:nvSpPr>
-          <p:cNvPr id="9" name="Text 7"/>
-          <p:cNvSpPr/>
-          <p:nvPr/>
-        </p:nvSpPr>
-        <p:spPr>
-          <a:xfrm>
-            <a:off x="3337560" y="2148840"/>
-            <a:ext cx="2514600" cy="594360"/>
-          </a:xfrm>
-          <a:prstGeom prst="rect">
-            <a:avLst/>
-          </a:prstGeom>
-          <a:noFill/>
-          <a:ln/>
-        </p:spPr>
-        <p:txBody>
-          <a:bodyPr wrap="square" rtlCol="0" anchor="ctr"/>
-          <a:lstStyle/>
-          <a:p>
-            <a:pPr algn="ctr" indent="0" marL="0">
-              <a:buNone/>
-            </a:pPr>
-            <a:r>
-              <a:rPr lang="en-US" sz="2400" b="1" dirty="0">
-                <a:solidFill>
-                  <a:srgbClr val="0EA5E9"/>
-                </a:solidFill>
-              </a:rPr>
-              <a:t>10</a:t>
-            </a:r>
-            <a:endParaRPr lang="en-US" sz="2400" dirty="0"/>
-          </a:p>
-        </p:txBody>
-      </p:sp>
-      <p:sp>
-        <p:nvSpPr>
-          <p:cNvPr id="10" name="Text 8"/>
-          <p:cNvSpPr/>
-          <p:nvPr/>
-        </p:nvSpPr>
-        <p:spPr>
-          <a:xfrm>
-            <a:off x="3429000" y="2788920"/>
-            <a:ext cx="2331720" cy="502920"/>
-          </a:xfrm>
-          <a:prstGeom prst="rect">
-            <a:avLst/>
-          </a:prstGeom>
-          <a:noFill/>
-          <a:ln/>
-        </p:spPr>
-        <p:txBody>
-          <a:bodyPr wrap="square" rtlCol="0" anchor="ctr"/>
-          <a:lstStyle/>
-          <a:p>
-            <a:pPr algn="ctr" indent="0" marL="0">
-              <a:buNone/>
-            </a:pPr>
-            <a:r>
-              <a:rPr lang="en-US" sz="1100" dirty="0">
-                <a:solidFill>
-                  <a:srgbClr val="4B5563"/>
-                </a:solidFill>
-              </a:rPr>
-              <a:t>Active Sales Reps</a:t>
-            </a:r>
-            <a:endParaRPr lang="en-US" sz="1100" dirty="0"/>
-          </a:p>
-        </p:txBody>
-      </p:sp>
-      <p:sp>
-        <p:nvSpPr>
-          <p:cNvPr id="11" name="Shape 9"/>
-          <p:cNvSpPr/>
-          <p:nvPr/>
-        </p:nvSpPr>
-        <p:spPr>
-          <a:xfrm>
-            <a:off x="6126480" y="2011680"/>
-            <a:ext cx="2514600" cy="1371600"/>
-          </a:xfrm>
-          <a:prstGeom prst="roundRect">
-            <a:avLst>
-              <a:gd name="adj" fmla="val 5333"/>
-            </a:avLst>
-          </a:prstGeom>
-          <a:solidFill>
-            <a:srgbClr val="F8FAFC"/>
-          </a:solidFill>
-          <a:ln w="12700">
-            <a:solidFill>
-              <a:srgbClr val="CBD5E1"/>
-            </a:solidFill>
-            <a:prstDash val="solid"/>
-          </a:ln>
-        </p:spPr>
-      </p:sp>
-      <p:sp>
-        <p:nvSpPr>
-          <p:cNvPr id="12" name="Text 10"/>
-          <p:cNvSpPr/>
-          <p:nvPr/>
-        </p:nvSpPr>
-        <p:spPr>
-          <a:xfrm>
-            <a:off x="6126480" y="2148840"/>
-            <a:ext cx="2514600" cy="594360"/>
-          </a:xfrm>
-          <a:prstGeom prst="rect">
-            <a:avLst/>
-          </a:prstGeom>
-          <a:noFill/>
-          <a:ln/>
-        </p:spPr>
-        <p:txBody>
-          <a:bodyPr wrap="square" rtlCol="0" anchor="ctr"/>
-          <a:lstStyle/>
-          <a:p>
-            <a:pPr algn="ctr" indent="0" marL="0">
-              <a:buNone/>
-            </a:pPr>
-            <a:r>
-              <a:rPr lang="en-US" sz="2400" b="1" dirty="0">
-                <a:solidFill>
-                  <a:srgbClr val="0EA5E9"/>
-                </a:solidFill>
-              </a:rPr>
-              <a:t>$232,564</a:t>
-            </a:r>
-            <a:endParaRPr lang="en-US" sz="2400" dirty="0"/>
-          </a:p>
-        </p:txBody>
-      </p:sp>
-      <p:sp>
-        <p:nvSpPr>
-          <p:cNvPr id="13" name="Text 11"/>
-          <p:cNvSpPr/>
-          <p:nvPr/>
-        </p:nvSpPr>
-        <p:spPr>
-          <a:xfrm>
-            <a:off x="6217920" y="2788920"/>
-            <a:ext cx="2331720" cy="502920"/>
-          </a:xfrm>
-          <a:prstGeom prst="rect">
-            <a:avLst/>
-          </a:prstGeom>
-          <a:noFill/>
-          <a:ln/>
-        </p:spPr>
-        <p:txBody>
-          <a:bodyPr wrap="square" rtlCol="0" anchor="ctr"/>
-          <a:lstStyle/>
-          <a:p>
-            <a:pPr algn="ctr" indent="0" marL="0">
-              <a:buNone/>
-            </a:pPr>
-            <a:r>
-              <a:rPr lang="en-US" sz="1100" dirty="0">
-                <a:solidFill>
-                  <a:srgbClr val="4B5563"/>
-                </a:solidFill>
-              </a:rPr>
-              <a:t>Total Revenue</a:t>
-            </a:r>
-            <a:endParaRPr lang="en-US" sz="1100" dirty="0"/>
-          </a:p>
-        </p:txBody>
-      </p:sp>
-      <p:sp>
-        <p:nvSpPr>
-          <p:cNvPr id="14" name="Shape 12"/>
-          <p:cNvSpPr/>
-          <p:nvPr/>
-        </p:nvSpPr>
-        <p:spPr>
-          <a:xfrm>
-            <a:off x="8915400" y="2011680"/>
-            <a:ext cx="2514600" cy="1371600"/>
-          </a:xfrm>
-          <a:prstGeom prst="roundRect">
-            <a:avLst>
-              <a:gd name="adj" fmla="val 5333"/>
-            </a:avLst>
-          </a:prstGeom>
-          <a:solidFill>
-            <a:srgbClr val="F8FAFC"/>
-          </a:solidFill>
-          <a:ln w="12700">
-            <a:solidFill>
-              <a:srgbClr val="CBD5E1"/>
-            </a:solidFill>
-            <a:prstDash val="solid"/>
-          </a:ln>
-        </p:spPr>
-      </p:sp>
-      <p:sp>
-        <p:nvSpPr>
-          <p:cNvPr id="15" name="Text 13"/>
-          <p:cNvSpPr/>
-          <p:nvPr/>
-        </p:nvSpPr>
-        <p:spPr>
-          <a:xfrm>
-            <a:off x="8915400" y="2148840"/>
-            <a:ext cx="2514600" cy="594360"/>
-          </a:xfrm>
-          <a:prstGeom prst="rect">
-            <a:avLst/>
-          </a:prstGeom>
-          <a:noFill/>
-          <a:ln/>
-        </p:spPr>
-        <p:txBody>
-          <a:bodyPr wrap="square" rtlCol="0" anchor="ctr"/>
-          <a:lstStyle/>
-          <a:p>
-            <a:pPr algn="ctr" indent="0" marL="0">
-              <a:buNone/>
-            </a:pPr>
-            <a:r>
-              <a:rPr lang="en-US" sz="2400" b="1" dirty="0">
-                <a:solidFill>
-                  <a:srgbClr val="0EA5E9"/>
-                </a:solidFill>
-              </a:rPr>
-              <a:t>40%</a:t>
-            </a:r>
-            <a:endParaRPr lang="en-US" sz="2400" dirty="0"/>
-          </a:p>
-        </p:txBody>
-      </p:sp>
-      <p:sp>
-        <p:nvSpPr>
-          <p:cNvPr id="16" name="Text 14"/>
-          <p:cNvSpPr/>
-          <p:nvPr/>
-        </p:nvSpPr>
-        <p:spPr>
-          <a:xfrm>
-            <a:off x="9006840" y="2788920"/>
-            <a:ext cx="2331720" cy="502920"/>
-          </a:xfrm>
-          <a:prstGeom prst="rect">
-            <a:avLst/>
-          </a:prstGeom>
-          <a:noFill/>
-          <a:ln/>
-        </p:spPr>
-        <p:txBody>
-          <a:bodyPr wrap="square" rtlCol="0" anchor="ctr"/>
-          <a:lstStyle/>
-          <a:p>
-            <a:pPr algn="ctr" indent="0" marL="0">
-              <a:buNone/>
-            </a:pPr>
-            <a:r>
-              <a:rPr lang="en-US" sz="1100" dirty="0">
-                <a:solidFill>
-                  <a:srgbClr val="4B5563"/>
-                </a:solidFill>
-              </a:rPr>
-              <a:t>Faster Reporting</a:t>
-            </a:r>
-            <a:endParaRPr lang="en-US" sz="1100" dirty="0"/>
-          </a:p>
-        </p:txBody>
-      </p:sp>
-      <p:sp>
-        <p:nvSpPr>
-          <p:cNvPr id="17" name="Text 15"/>
-          <p:cNvSpPr/>
-          <p:nvPr/>
-        </p:nvSpPr>
-        <p:spPr>
-          <a:xfrm>
-            <a:off x="548640" y="4206240"/>
-            <a:ext cx="11064240" cy="1097280"/>
-          </a:xfrm>
-          <a:prstGeom prst="rect">
-            <a:avLst/>
-          </a:prstGeom>
-          <a:noFill/>
-          <a:ln/>
-        </p:spPr>
-        <p:txBody>
-          <a:bodyPr wrap="square" rtlCol="0" anchor="ctr"/>
-          <a:lstStyle/>
-          <a:p>
-            <a:pPr indent="0" marL="0">
-              <a:buNone/>
-            </a:pPr>
-            <a:r>
-              <a:rPr lang="en-US" sz="1250" i="1" dirty="0">
-                <a:solidFill>
-                  <a:srgbClr val="4B5563"/>
-                </a:solidFill>
-              </a:rPr>
-              <a:t>Reporting workflow breaks down revenue by region, rep, product, and channel (Online vs Retail), with a repeatable SQL view powering monthly refreshes. Note: this demo uses a smaller, clearly-labeled representative sample dataset (not the original 50,000-record dataset) to keep the workflow runnable end-to-end.</a:t>
-            </a:r>
-            <a:endParaRPr lang="en-US" sz="1250" dirty="0"/>
-          </a:p>
-        </p:txBody>
-      </p:sp>
-      <p:sp>
-        <p:nvSpPr>
-          <p:cNvPr id="18" name="Text 16"/>
-          <p:cNvSpPr/>
-          <p:nvPr/>
-        </p:nvSpPr>
-        <p:spPr>
-          <a:xfrm>
-            <a:off x="548640" y="5394960"/>
-            <a:ext cx="11064240" cy="365760"/>
-          </a:xfrm>
-          <a:prstGeom prst="rect">
-            <a:avLst/>
-          </a:prstGeom>
-          <a:noFill/>
-          <a:ln/>
-        </p:spPr>
-        <p:txBody>
-          <a:bodyPr wrap="square" rtlCol="0" anchor="ctr"/>
-          <a:lstStyle/>
-          <a:p>
-            <a:pPr indent="0" marL="0">
-              <a:buNone/>
-            </a:pPr>
-            <a:r>
-              <a:rPr lang="en-US" sz="1200" b="1" dirty="0">
-                <a:solidFill>
-                  <a:srgbClr val="0F766E"/>
-                </a:solidFill>
-              </a:rPr>
-              <a:t>Live Dashboard: projects/sales-performance-analysis/dashboard.html  |  Code &amp; Data on GitHub</a:t>
-            </a:r>
-            <a:endParaRPr lang="en-US" sz="1200" dirty="0"/>
+              <a:rPr lang="en-US" sz="2000" dirty="0">
+                <a:solidFill>
+                  <a:srgbClr val="333333"/>
+                </a:solidFill>
+              </a:rPr>
+              <a:t>Analyze sales representative performance to identify top performers, quota attainment, and opportunities to speed up reporting.</a:t>
+            </a:r>
+            <a:endParaRPr lang="en-US" sz="2000" dirty="0"/>
           </a:p>
         </p:txBody>
       </p:sp>
@@ -2612,16 +2022,9 @@
 </p:sld>
 </file>
 
-<file path=ppt/slides/slide4.xml><?xml version="1.0" encoding="utf-8"?>
+<file path=ppt/slides/slide3.xml><?xml version="1.0" encoding="utf-8"?>
 <p:sld xmlns:a="http://schemas.openxmlformats.org/drawingml/2006/main" xmlns:r="http://schemas.openxmlformats.org/officeDocument/2006/relationships" xmlns:p="http://schemas.openxmlformats.org/presentationml/2006/main">
-  <p:cSld name="Slide 4">
-    <p:bg>
-      <p:bgPr>
-        <a:solidFill>
-          <a:srgbClr val="1F2937"/>
-        </a:solidFill>
-      </p:bgPr>
-    </p:bg>
+  <p:cSld name="Slide 3">
     <p:spTree>
       <p:nvGrpSpPr>
         <p:cNvPr id="1" name=""/>
@@ -2638,34 +2041,529 @@
       </p:grpSpPr>
       <p:sp>
         <p:nvSpPr>
-          <p:cNvPr id="2" name="Shape 0"/>
-          <p:cNvSpPr/>
-          <p:nvPr/>
-        </p:nvSpPr>
-        <p:spPr>
-          <a:xfrm>
-            <a:off x="0" y="3108960"/>
-            <a:ext cx="12188952" cy="45720"/>
-          </a:xfrm>
-          <a:prstGeom prst="rect">
-            <a:avLst/>
+          <p:cNvPr id="2" name="Text 0"/>
+          <p:cNvSpPr/>
+          <p:nvPr/>
+        </p:nvSpPr>
+        <p:spPr>
+          <a:xfrm>
+            <a:off x="457200" y="320040"/>
+            <a:ext cx="8229600" cy="548640"/>
+          </a:xfrm>
+          <a:prstGeom prst="rect">
+            <a:avLst/>
+          </a:prstGeom>
+          <a:noFill/>
+          <a:ln/>
+        </p:spPr>
+        <p:txBody>
+          <a:bodyPr wrap="square" rtlCol="0" anchor="ctr"/>
+          <a:lstStyle/>
+          <a:p>
+            <a:pPr indent="0" marL="0">
+              <a:buNone/>
+            </a:pPr>
+            <a:r>
+              <a:rPr lang="en-US" sz="2600" b="1" dirty="0">
+                <a:solidFill>
+                  <a:srgbClr val="2E5BFF"/>
+                </a:solidFill>
+              </a:rPr>
+              <a:t>Methodology: Step by Step</a:t>
+            </a:r>
+            <a:endParaRPr lang="en-US" sz="2600" dirty="0"/>
+          </a:p>
+        </p:txBody>
+      </p:sp>
+      <p:sp>
+        <p:nvSpPr>
+          <p:cNvPr id="3" name="Shape 1"/>
+          <p:cNvSpPr/>
+          <p:nvPr/>
+        </p:nvSpPr>
+        <p:spPr>
+          <a:xfrm>
+            <a:off x="457200" y="1554480"/>
+            <a:ext cx="1874520" cy="1645920"/>
+          </a:xfrm>
+          <a:prstGeom prst="roundRect">
+            <a:avLst>
+              <a:gd name="adj" fmla="val 5556"/>
+            </a:avLst>
           </a:prstGeom>
           <a:solidFill>
-            <a:srgbClr val="0EA5E9"/>
+            <a:srgbClr val="2E5BFF"/>
           </a:solidFill>
           <a:ln/>
         </p:spPr>
       </p:sp>
       <p:sp>
         <p:nvSpPr>
+          <p:cNvPr id="4" name="Text 2"/>
+          <p:cNvSpPr/>
+          <p:nvPr/>
+        </p:nvSpPr>
+        <p:spPr>
+          <a:xfrm>
+            <a:off x="457200" y="1554480"/>
+            <a:ext cx="1874520" cy="1645920"/>
+          </a:xfrm>
+          <a:prstGeom prst="rect">
+            <a:avLst/>
+          </a:prstGeom>
+          <a:noFill/>
+          <a:ln/>
+        </p:spPr>
+        <p:txBody>
+          <a:bodyPr wrap="square" rtlCol="0" anchor="ctr"/>
+          <a:lstStyle/>
+          <a:p>
+            <a:pPr algn="ctr" indent="0" marL="0">
+              <a:buNone/>
+            </a:pPr>
+            <a:r>
+              <a:rPr lang="en-US" sz="1400" b="1" dirty="0">
+                <a:solidFill>
+                  <a:srgbClr val="FFFFFF"/>
+                </a:solidFill>
+              </a:rPr>
+              <a:t>1. Data Collection</a:t>
+            </a:r>
+            <a:endParaRPr lang="en-US" sz="1400" dirty="0"/>
+          </a:p>
+          <a:p>
+            <a:pPr algn="ctr" indent="0" marL="0">
+              <a:buNone/>
+            </a:pPr>
+            <a:r>
+              <a:rPr lang="en-US" sz="1400" b="1" dirty="0">
+                <a:solidFill>
+                  <a:srgbClr val="FFFFFF"/>
+                </a:solidFill>
+              </a:rPr>
+              <a:t>&amp; Preparation</a:t>
+            </a:r>
+            <a:endParaRPr lang="en-US" sz="1400" dirty="0"/>
+          </a:p>
+        </p:txBody>
+      </p:sp>
+      <p:sp>
+        <p:nvSpPr>
+          <p:cNvPr id="5" name="Text 3"/>
+          <p:cNvSpPr/>
+          <p:nvPr/>
+        </p:nvSpPr>
+        <p:spPr>
+          <a:xfrm>
+            <a:off x="2331720" y="2148840"/>
+            <a:ext cx="274320" cy="548640"/>
+          </a:xfrm>
+          <a:prstGeom prst="rect">
+            <a:avLst/>
+          </a:prstGeom>
+          <a:noFill/>
+          <a:ln/>
+        </p:spPr>
+        <p:txBody>
+          <a:bodyPr wrap="square" rtlCol="0" anchor="ctr"/>
+          <a:lstStyle/>
+          <a:p>
+            <a:pPr algn="ctr" indent="0" marL="0">
+              <a:buNone/>
+            </a:pPr>
+            <a:r>
+              <a:rPr lang="en-US" sz="2400" dirty="0">
+                <a:solidFill>
+                  <a:srgbClr val="666666"/>
+                </a:solidFill>
+              </a:rPr>
+              <a:t>→</a:t>
+            </a:r>
+            <a:endParaRPr lang="en-US" sz="2400" dirty="0"/>
+          </a:p>
+        </p:txBody>
+      </p:sp>
+      <p:sp>
+        <p:nvSpPr>
+          <p:cNvPr id="6" name="Shape 4"/>
+          <p:cNvSpPr/>
+          <p:nvPr/>
+        </p:nvSpPr>
+        <p:spPr>
+          <a:xfrm>
+            <a:off x="2560320" y="1554480"/>
+            <a:ext cx="1874520" cy="1645920"/>
+          </a:xfrm>
+          <a:prstGeom prst="roundRect">
+            <a:avLst>
+              <a:gd name="adj" fmla="val 5556"/>
+            </a:avLst>
+          </a:prstGeom>
+          <a:solidFill>
+            <a:srgbClr val="7C3AED"/>
+          </a:solidFill>
+          <a:ln/>
+        </p:spPr>
+      </p:sp>
+      <p:sp>
+        <p:nvSpPr>
+          <p:cNvPr id="7" name="Text 5"/>
+          <p:cNvSpPr/>
+          <p:nvPr/>
+        </p:nvSpPr>
+        <p:spPr>
+          <a:xfrm>
+            <a:off x="2560320" y="1554480"/>
+            <a:ext cx="1874520" cy="1645920"/>
+          </a:xfrm>
+          <a:prstGeom prst="rect">
+            <a:avLst/>
+          </a:prstGeom>
+          <a:noFill/>
+          <a:ln/>
+        </p:spPr>
+        <p:txBody>
+          <a:bodyPr wrap="square" rtlCol="0" anchor="ctr"/>
+          <a:lstStyle/>
+          <a:p>
+            <a:pPr algn="ctr" indent="0" marL="0">
+              <a:buNone/>
+            </a:pPr>
+            <a:r>
+              <a:rPr lang="en-US" sz="1400" b="1" dirty="0">
+                <a:solidFill>
+                  <a:srgbClr val="FFFFFF"/>
+                </a:solidFill>
+              </a:rPr>
+              <a:t>2. SQL Analysis</a:t>
+            </a:r>
+            <a:endParaRPr lang="en-US" sz="1400" dirty="0"/>
+          </a:p>
+        </p:txBody>
+      </p:sp>
+      <p:sp>
+        <p:nvSpPr>
+          <p:cNvPr id="8" name="Text 6"/>
+          <p:cNvSpPr/>
+          <p:nvPr/>
+        </p:nvSpPr>
+        <p:spPr>
+          <a:xfrm>
+            <a:off x="4434840" y="2148840"/>
+            <a:ext cx="274320" cy="548640"/>
+          </a:xfrm>
+          <a:prstGeom prst="rect">
+            <a:avLst/>
+          </a:prstGeom>
+          <a:noFill/>
+          <a:ln/>
+        </p:spPr>
+        <p:txBody>
+          <a:bodyPr wrap="square" rtlCol="0" anchor="ctr"/>
+          <a:lstStyle/>
+          <a:p>
+            <a:pPr algn="ctr" indent="0" marL="0">
+              <a:buNone/>
+            </a:pPr>
+            <a:r>
+              <a:rPr lang="en-US" sz="2400" dirty="0">
+                <a:solidFill>
+                  <a:srgbClr val="666666"/>
+                </a:solidFill>
+              </a:rPr>
+              <a:t>→</a:t>
+            </a:r>
+            <a:endParaRPr lang="en-US" sz="2400" dirty="0"/>
+          </a:p>
+        </p:txBody>
+      </p:sp>
+      <p:sp>
+        <p:nvSpPr>
+          <p:cNvPr id="9" name="Shape 7"/>
+          <p:cNvSpPr/>
+          <p:nvPr/>
+        </p:nvSpPr>
+        <p:spPr>
+          <a:xfrm>
+            <a:off x="4663440" y="1554480"/>
+            <a:ext cx="1874520" cy="1645920"/>
+          </a:xfrm>
+          <a:prstGeom prst="roundRect">
+            <a:avLst>
+              <a:gd name="adj" fmla="val 5556"/>
+            </a:avLst>
+          </a:prstGeom>
+          <a:solidFill>
+            <a:srgbClr val="DB2777"/>
+          </a:solidFill>
+          <a:ln/>
+        </p:spPr>
+      </p:sp>
+      <p:sp>
+        <p:nvSpPr>
+          <p:cNvPr id="10" name="Text 8"/>
+          <p:cNvSpPr/>
+          <p:nvPr/>
+        </p:nvSpPr>
+        <p:spPr>
+          <a:xfrm>
+            <a:off x="4663440" y="1554480"/>
+            <a:ext cx="1874520" cy="1645920"/>
+          </a:xfrm>
+          <a:prstGeom prst="rect">
+            <a:avLst/>
+          </a:prstGeom>
+          <a:noFill/>
+          <a:ln/>
+        </p:spPr>
+        <p:txBody>
+          <a:bodyPr wrap="square" rtlCol="0" anchor="ctr"/>
+          <a:lstStyle/>
+          <a:p>
+            <a:pPr algn="ctr" indent="0" marL="0">
+              <a:buNone/>
+            </a:pPr>
+            <a:r>
+              <a:rPr lang="en-US" sz="1400" b="1" dirty="0">
+                <a:solidFill>
+                  <a:srgbClr val="FFFFFF"/>
+                </a:solidFill>
+              </a:rPr>
+              <a:t>3. Python Analysis</a:t>
+            </a:r>
+            <a:endParaRPr lang="en-US" sz="1400" dirty="0"/>
+          </a:p>
+          <a:p>
+            <a:pPr algn="ctr" indent="0" marL="0">
+              <a:buNone/>
+            </a:pPr>
+            <a:r>
+              <a:rPr lang="en-US" sz="1400" b="1" dirty="0">
+                <a:solidFill>
+                  <a:srgbClr val="FFFFFF"/>
+                </a:solidFill>
+              </a:rPr>
+              <a:t>(Modeling)</a:t>
+            </a:r>
+            <a:endParaRPr lang="en-US" sz="1400" dirty="0"/>
+          </a:p>
+        </p:txBody>
+      </p:sp>
+      <p:sp>
+        <p:nvSpPr>
+          <p:cNvPr id="11" name="Text 9"/>
+          <p:cNvSpPr/>
+          <p:nvPr/>
+        </p:nvSpPr>
+        <p:spPr>
+          <a:xfrm>
+            <a:off x="6537960" y="2148840"/>
+            <a:ext cx="274320" cy="548640"/>
+          </a:xfrm>
+          <a:prstGeom prst="rect">
+            <a:avLst/>
+          </a:prstGeom>
+          <a:noFill/>
+          <a:ln/>
+        </p:spPr>
+        <p:txBody>
+          <a:bodyPr wrap="square" rtlCol="0" anchor="ctr"/>
+          <a:lstStyle/>
+          <a:p>
+            <a:pPr algn="ctr" indent="0" marL="0">
+              <a:buNone/>
+            </a:pPr>
+            <a:r>
+              <a:rPr lang="en-US" sz="2400" dirty="0">
+                <a:solidFill>
+                  <a:srgbClr val="666666"/>
+                </a:solidFill>
+              </a:rPr>
+              <a:t>→</a:t>
+            </a:r>
+            <a:endParaRPr lang="en-US" sz="2400" dirty="0"/>
+          </a:p>
+        </p:txBody>
+      </p:sp>
+      <p:sp>
+        <p:nvSpPr>
+          <p:cNvPr id="12" name="Shape 10"/>
+          <p:cNvSpPr/>
+          <p:nvPr/>
+        </p:nvSpPr>
+        <p:spPr>
+          <a:xfrm>
+            <a:off x="6766560" y="1554480"/>
+            <a:ext cx="1874520" cy="1645920"/>
+          </a:xfrm>
+          <a:prstGeom prst="roundRect">
+            <a:avLst>
+              <a:gd name="adj" fmla="val 5556"/>
+            </a:avLst>
+          </a:prstGeom>
+          <a:solidFill>
+            <a:srgbClr val="059669"/>
+          </a:solidFill>
+          <a:ln/>
+        </p:spPr>
+      </p:sp>
+      <p:sp>
+        <p:nvSpPr>
+          <p:cNvPr id="13" name="Text 11"/>
+          <p:cNvSpPr/>
+          <p:nvPr/>
+        </p:nvSpPr>
+        <p:spPr>
+          <a:xfrm>
+            <a:off x="6766560" y="1554480"/>
+            <a:ext cx="1874520" cy="1645920"/>
+          </a:xfrm>
+          <a:prstGeom prst="rect">
+            <a:avLst/>
+          </a:prstGeom>
+          <a:noFill/>
+          <a:ln/>
+        </p:spPr>
+        <p:txBody>
+          <a:bodyPr wrap="square" rtlCol="0" anchor="ctr"/>
+          <a:lstStyle/>
+          <a:p>
+            <a:pPr algn="ctr" indent="0" marL="0">
+              <a:buNone/>
+            </a:pPr>
+            <a:r>
+              <a:rPr lang="en-US" sz="1400" b="1" dirty="0">
+                <a:solidFill>
+                  <a:srgbClr val="FFFFFF"/>
+                </a:solidFill>
+              </a:rPr>
+              <a:t>4. Dashboard</a:t>
+            </a:r>
+            <a:endParaRPr lang="en-US" sz="1400" dirty="0"/>
+          </a:p>
+          <a:p>
+            <a:pPr algn="ctr" indent="0" marL="0">
+              <a:buNone/>
+            </a:pPr>
+            <a:r>
+              <a:rPr lang="en-US" sz="1400" b="1" dirty="0">
+                <a:solidFill>
+                  <a:srgbClr val="FFFFFF"/>
+                </a:solidFill>
+              </a:rPr>
+              <a:t>Development</a:t>
+            </a:r>
+            <a:endParaRPr lang="en-US" sz="1400" dirty="0"/>
+          </a:p>
+        </p:txBody>
+      </p:sp>
+      <p:sp>
+        <p:nvSpPr>
+          <p:cNvPr id="14" name="Text 12"/>
+          <p:cNvSpPr/>
+          <p:nvPr/>
+        </p:nvSpPr>
+        <p:spPr>
+          <a:xfrm>
+            <a:off x="457200" y="3474720"/>
+            <a:ext cx="8229600" cy="548640"/>
+          </a:xfrm>
+          <a:prstGeom prst="rect">
+            <a:avLst/>
+          </a:prstGeom>
+          <a:noFill/>
+          <a:ln/>
+        </p:spPr>
+        <p:txBody>
+          <a:bodyPr wrap="square" rtlCol="0" anchor="ctr"/>
+          <a:lstStyle/>
+          <a:p>
+            <a:pPr algn="ctr" indent="0" marL="0">
+              <a:buNone/>
+            </a:pPr>
+            <a:r>
+              <a:rPr lang="en-US" sz="1400" i="1" dirty="0">
+                <a:solidFill>
+                  <a:srgbClr val="555555"/>
+                </a:solidFill>
+              </a:rPr>
+              <a:t>Full workflow used to go from raw idea to a working, data-backed dashboard.</a:t>
+            </a:r>
+            <a:endParaRPr lang="en-US" sz="1400" dirty="0"/>
+          </a:p>
+        </p:txBody>
+      </p:sp>
+    </p:spTree>
+  </p:cSld>
+  <p:clrMapOvr>
+    <a:masterClrMapping/>
+  </p:clrMapOvr>
+</p:sld>
+</file>
+
+<file path=ppt/slides/slide4.xml><?xml version="1.0" encoding="utf-8"?>
+<p:sld xmlns:a="http://schemas.openxmlformats.org/drawingml/2006/main" xmlns:r="http://schemas.openxmlformats.org/officeDocument/2006/relationships" xmlns:p="http://schemas.openxmlformats.org/presentationml/2006/main">
+  <p:cSld name="Slide 4">
+    <p:spTree>
+      <p:nvGrpSpPr>
+        <p:cNvPr id="1" name=""/>
+        <p:cNvGrpSpPr/>
+        <p:nvPr/>
+      </p:nvGrpSpPr>
+      <p:grpSpPr>
+        <a:xfrm>
+          <a:off x="0" y="0"/>
+          <a:ext cx="0" cy="0"/>
+          <a:chOff x="0" y="0"/>
+          <a:chExt cx="0" cy="0"/>
+        </a:xfrm>
+      </p:grpSpPr>
+      <p:sp>
+        <p:nvSpPr>
+          <p:cNvPr id="2" name="Text 0"/>
+          <p:cNvSpPr/>
+          <p:nvPr/>
+        </p:nvSpPr>
+        <p:spPr>
+          <a:xfrm>
+            <a:off x="457200" y="320040"/>
+            <a:ext cx="8229600" cy="548640"/>
+          </a:xfrm>
+          <a:prstGeom prst="rect">
+            <a:avLst/>
+          </a:prstGeom>
+          <a:noFill/>
+          <a:ln/>
+        </p:spPr>
+        <p:txBody>
+          <a:bodyPr wrap="square" rtlCol="0" anchor="ctr"/>
+          <a:lstStyle/>
+          <a:p>
+            <a:pPr indent="0" marL="0">
+              <a:buNone/>
+            </a:pPr>
+            <a:r>
+              <a:rPr lang="en-US" sz="2400" b="1" dirty="0">
+                <a:solidFill>
+                  <a:srgbClr val="2E5BFF"/>
+                </a:solidFill>
+              </a:rPr>
+              <a:t>Step 1 — Data Collection &amp; Preparation</a:t>
+            </a:r>
+            <a:endParaRPr lang="en-US" sz="2400" dirty="0"/>
+          </a:p>
+        </p:txBody>
+      </p:sp>
+      <p:sp>
+        <p:nvSpPr>
           <p:cNvPr id="3" name="Text 1"/>
           <p:cNvSpPr/>
           <p:nvPr/>
         </p:nvSpPr>
         <p:spPr>
           <a:xfrm>
-            <a:off x="731520" y="2560320"/>
-            <a:ext cx="10698480" cy="822960"/>
+            <a:off x="457200" y="1188720"/>
+            <a:ext cx="8229600" cy="1371600"/>
           </a:xfrm>
           <a:prstGeom prst="rect">
             <a:avLst/>
@@ -2674,6 +2572,42 @@
           <a:ln/>
         </p:spPr>
         <p:txBody>
+          <a:bodyPr wrap="square" rtlCol="0" anchor="t"/>
+          <a:lstStyle/>
+          <a:p>
+            <a:pPr indent="0" marL="0">
+              <a:buNone/>
+            </a:pPr>
+            <a:r>
+              <a:rPr lang="en-US" sz="1800" dirty="0">
+                <a:solidFill>
+                  <a:srgbClr val="333333"/>
+                </a:solidFill>
+              </a:rPr>
+              <a:t>Synthetic sample dataset (seed=99, reproducible): 260 sales records across 10 sales representatives.</a:t>
+            </a:r>
+            <a:endParaRPr lang="en-US" sz="1800" dirty="0"/>
+          </a:p>
+        </p:txBody>
+      </p:sp>
+      <p:sp>
+        <p:nvSpPr>
+          <p:cNvPr id="4" name="Text 2"/>
+          <p:cNvSpPr/>
+          <p:nvPr/>
+        </p:nvSpPr>
+        <p:spPr>
+          <a:xfrm>
+            <a:off x="457200" y="4206240"/>
+            <a:ext cx="8229600" cy="548640"/>
+          </a:xfrm>
+          <a:prstGeom prst="rect">
+            <a:avLst/>
+          </a:prstGeom>
+          <a:noFill/>
+          <a:ln/>
+        </p:spPr>
+        <p:txBody>
           <a:bodyPr wrap="square" rtlCol="0" anchor="ctr"/>
           <a:lstStyle/>
           <a:p>
@@ -2681,16 +2615,744 @@
               <a:buNone/>
             </a:pPr>
             <a:r>
-              <a:rPr lang="en-US" sz="3600" b="1" dirty="0">
-                <a:solidFill>
-                  <a:srgbClr val="FFFFFF"/>
-                </a:solidFill>
-              </a:rPr>
-              <a:t>Thank You</a:t>
-            </a:r>
-            <a:endParaRPr lang="en-US" sz="3600" dirty="0"/>
-          </a:p>
-        </p:txBody>
+              <a:rPr lang="en-US" sz="1200" i="1" dirty="0">
+                <a:solidFill>
+                  <a:srgbClr val="888888"/>
+                </a:solidFill>
+              </a:rPr>
+              <a:t>Note: this is a representative sample dataset generated for demonstration purposes, not the full production-scale dataset.</a:t>
+            </a:r>
+            <a:endParaRPr lang="en-US" sz="1200" dirty="0"/>
+          </a:p>
+        </p:txBody>
+      </p:sp>
+    </p:spTree>
+  </p:cSld>
+  <p:clrMapOvr>
+    <a:masterClrMapping/>
+  </p:clrMapOvr>
+</p:sld>
+</file>
+
+<file path=ppt/slides/slide5.xml><?xml version="1.0" encoding="utf-8"?>
+<p:sld xmlns:a="http://schemas.openxmlformats.org/drawingml/2006/main" xmlns:r="http://schemas.openxmlformats.org/officeDocument/2006/relationships" xmlns:p="http://schemas.openxmlformats.org/presentationml/2006/main">
+  <p:cSld name="Slide 5">
+    <p:spTree>
+      <p:nvGrpSpPr>
+        <p:cNvPr id="1" name=""/>
+        <p:cNvGrpSpPr/>
+        <p:nvPr/>
+      </p:nvGrpSpPr>
+      <p:grpSpPr>
+        <a:xfrm>
+          <a:off x="0" y="0"/>
+          <a:ext cx="0" cy="0"/>
+          <a:chOff x="0" y="0"/>
+          <a:chExt cx="0" cy="0"/>
+        </a:xfrm>
+      </p:grpSpPr>
+      <p:sp>
+        <p:nvSpPr>
+          <p:cNvPr id="2" name="Text 0"/>
+          <p:cNvSpPr/>
+          <p:nvPr/>
+        </p:nvSpPr>
+        <p:spPr>
+          <a:xfrm>
+            <a:off x="457200" y="320040"/>
+            <a:ext cx="8229600" cy="457200"/>
+          </a:xfrm>
+          <a:prstGeom prst="rect">
+            <a:avLst/>
+          </a:prstGeom>
+          <a:noFill/>
+          <a:ln/>
+        </p:spPr>
+        <p:txBody>
+          <a:bodyPr wrap="square" rtlCol="0" anchor="ctr"/>
+          <a:lstStyle/>
+          <a:p>
+            <a:pPr indent="0" marL="0">
+              <a:buNone/>
+            </a:pPr>
+            <a:r>
+              <a:rPr lang="en-US" sz="2400" b="1" dirty="0">
+                <a:solidFill>
+                  <a:srgbClr val="7C3AED"/>
+                </a:solidFill>
+              </a:rPr>
+              <a:t>Step 2 — SQL Analysis</a:t>
+            </a:r>
+            <a:endParaRPr lang="en-US" sz="2400" dirty="0"/>
+          </a:p>
+        </p:txBody>
+      </p:sp>
+      <p:sp>
+        <p:nvSpPr>
+          <p:cNvPr id="3" name="Text 1"/>
+          <p:cNvSpPr/>
+          <p:nvPr/>
+        </p:nvSpPr>
+        <p:spPr>
+          <a:xfrm>
+            <a:off x="457200" y="868680"/>
+            <a:ext cx="8229600" cy="822960"/>
+          </a:xfrm>
+          <a:prstGeom prst="rect">
+            <a:avLst/>
+          </a:prstGeom>
+          <a:noFill/>
+          <a:ln/>
+        </p:spPr>
+        <p:txBody>
+          <a:bodyPr wrap="square" rtlCol="0" anchor="t"/>
+          <a:lstStyle/>
+          <a:p>
+            <a:pPr indent="0" marL="0">
+              <a:buNone/>
+            </a:pPr>
+            <a:r>
+              <a:rPr lang="en-US" sz="1500" dirty="0">
+                <a:solidFill>
+                  <a:srgbClr val="333333"/>
+                </a:solidFill>
+              </a:rPr>
+              <a:t>Used SQL aggregation and ranking to compute total revenue, deal count, and quota attainment per rep.</a:t>
+            </a:r>
+            <a:endParaRPr lang="en-US" sz="1500" dirty="0"/>
+          </a:p>
+        </p:txBody>
+      </p:sp>
+      <p:sp>
+        <p:nvSpPr>
+          <p:cNvPr id="4" name="Shape 2"/>
+          <p:cNvSpPr/>
+          <p:nvPr/>
+        </p:nvSpPr>
+        <p:spPr>
+          <a:xfrm>
+            <a:off x="457200" y="1783080"/>
+            <a:ext cx="8229600" cy="2011680"/>
+          </a:xfrm>
+          <a:prstGeom prst="rect">
+            <a:avLst/>
+          </a:prstGeom>
+          <a:solidFill>
+            <a:srgbClr val="1E1E2E"/>
+          </a:solidFill>
+          <a:ln w="12700">
+            <a:solidFill>
+              <a:srgbClr val="444444"/>
+            </a:solidFill>
+            <a:prstDash val="solid"/>
+          </a:ln>
+        </p:spPr>
+      </p:sp>
+      <p:sp>
+        <p:nvSpPr>
+          <p:cNvPr id="5" name="Text 3"/>
+          <p:cNvSpPr/>
+          <p:nvPr/>
+        </p:nvSpPr>
+        <p:spPr>
+          <a:xfrm>
+            <a:off x="594360" y="1874520"/>
+            <a:ext cx="7955280" cy="1828800"/>
+          </a:xfrm>
+          <a:prstGeom prst="rect">
+            <a:avLst/>
+          </a:prstGeom>
+          <a:noFill/>
+          <a:ln/>
+        </p:spPr>
+        <p:txBody>
+          <a:bodyPr wrap="square" rtlCol="0" anchor="t"/>
+          <a:lstStyle/>
+          <a:p>
+            <a:pPr indent="0" marL="0">
+              <a:buNone/>
+            </a:pPr>
+            <a:r>
+              <a:rPr lang="en-US" sz="1100" dirty="0">
+                <a:solidFill>
+                  <a:srgbClr val="D4D4D4"/>
+                </a:solidFill>
+                <a:latin typeface="Consolas" pitchFamily="34" charset="0"/>
+                <a:ea typeface="Consolas" pitchFamily="34" charset="-122"/>
+                <a:cs typeface="Consolas" pitchFamily="34" charset="-120"/>
+              </a:rPr>
+              <a:t>SELECT rep_id,</a:t>
+            </a:r>
+            <a:endParaRPr lang="en-US" sz="1100" dirty="0"/>
+          </a:p>
+          <a:p>
+            <a:pPr indent="0" marL="0">
+              <a:buNone/>
+            </a:pPr>
+            <a:r>
+              <a:rPr lang="en-US" sz="1100" dirty="0">
+                <a:solidFill>
+                  <a:srgbClr val="D4D4D4"/>
+                </a:solidFill>
+                <a:latin typeface="Consolas" pitchFamily="34" charset="0"/>
+                <a:ea typeface="Consolas" pitchFamily="34" charset="-122"/>
+                <a:cs typeface="Consolas" pitchFamily="34" charset="-120"/>
+              </a:rPr>
+              <a:t> SUM(sale_amount) AS total_revenue,</a:t>
+            </a:r>
+            <a:endParaRPr lang="en-US" sz="1100" dirty="0"/>
+          </a:p>
+          <a:p>
+            <a:pPr indent="0" marL="0">
+              <a:buNone/>
+            </a:pPr>
+            <a:r>
+              <a:rPr lang="en-US" sz="1100" dirty="0">
+                <a:solidFill>
+                  <a:srgbClr val="D4D4D4"/>
+                </a:solidFill>
+                <a:latin typeface="Consolas" pitchFamily="34" charset="0"/>
+                <a:ea typeface="Consolas" pitchFamily="34" charset="-122"/>
+                <a:cs typeface="Consolas" pitchFamily="34" charset="-120"/>
+              </a:rPr>
+              <a:t> COUNT(*) AS deals,</a:t>
+            </a:r>
+            <a:endParaRPr lang="en-US" sz="1100" dirty="0"/>
+          </a:p>
+          <a:p>
+            <a:pPr indent="0" marL="0">
+              <a:buNone/>
+            </a:pPr>
+            <a:r>
+              <a:rPr lang="en-US" sz="1100" dirty="0">
+                <a:solidFill>
+                  <a:srgbClr val="D4D4D4"/>
+                </a:solidFill>
+                <a:latin typeface="Consolas" pitchFamily="34" charset="0"/>
+                <a:ea typeface="Consolas" pitchFamily="34" charset="-122"/>
+                <a:cs typeface="Consolas" pitchFamily="34" charset="-120"/>
+              </a:rPr>
+              <a:t> SUM(sale_amount)/quota AS quota_attainment</a:t>
+            </a:r>
+            <a:endParaRPr lang="en-US" sz="1100" dirty="0"/>
+          </a:p>
+          <a:p>
+            <a:pPr indent="0" marL="0">
+              <a:buNone/>
+            </a:pPr>
+            <a:r>
+              <a:rPr lang="en-US" sz="1100" dirty="0">
+                <a:solidFill>
+                  <a:srgbClr val="D4D4D4"/>
+                </a:solidFill>
+                <a:latin typeface="Consolas" pitchFamily="34" charset="0"/>
+                <a:ea typeface="Consolas" pitchFamily="34" charset="-122"/>
+                <a:cs typeface="Consolas" pitchFamily="34" charset="-120"/>
+              </a:rPr>
+              <a:t>FROM sales</a:t>
+            </a:r>
+            <a:endParaRPr lang="en-US" sz="1100" dirty="0"/>
+          </a:p>
+          <a:p>
+            <a:pPr indent="0" marL="0">
+              <a:buNone/>
+            </a:pPr>
+            <a:r>
+              <a:rPr lang="en-US" sz="1100" dirty="0">
+                <a:solidFill>
+                  <a:srgbClr val="D4D4D4"/>
+                </a:solidFill>
+                <a:latin typeface="Consolas" pitchFamily="34" charset="0"/>
+                <a:ea typeface="Consolas" pitchFamily="34" charset="-122"/>
+                <a:cs typeface="Consolas" pitchFamily="34" charset="-120"/>
+              </a:rPr>
+              <a:t>GROUP BY rep_id, quota</a:t>
+            </a:r>
+            <a:endParaRPr lang="en-US" sz="1100" dirty="0"/>
+          </a:p>
+          <a:p>
+            <a:pPr indent="0" marL="0">
+              <a:buNone/>
+            </a:pPr>
+            <a:r>
+              <a:rPr lang="en-US" sz="1100" dirty="0">
+                <a:solidFill>
+                  <a:srgbClr val="D4D4D4"/>
+                </a:solidFill>
+                <a:latin typeface="Consolas" pitchFamily="34" charset="0"/>
+                <a:ea typeface="Consolas" pitchFamily="34" charset="-122"/>
+                <a:cs typeface="Consolas" pitchFamily="34" charset="-120"/>
+              </a:rPr>
+              <a:t>ORDER BY total_revenue DESC;</a:t>
+            </a:r>
+            <a:endParaRPr lang="en-US" sz="1100" dirty="0"/>
+          </a:p>
+        </p:txBody>
+      </p:sp>
+    </p:spTree>
+  </p:cSld>
+  <p:clrMapOvr>
+    <a:masterClrMapping/>
+  </p:clrMapOvr>
+</p:sld>
+</file>
+
+<file path=ppt/slides/slide6.xml><?xml version="1.0" encoding="utf-8"?>
+<p:sld xmlns:a="http://schemas.openxmlformats.org/drawingml/2006/main" xmlns:r="http://schemas.openxmlformats.org/officeDocument/2006/relationships" xmlns:p="http://schemas.openxmlformats.org/presentationml/2006/main">
+  <p:cSld name="Slide 6">
+    <p:spTree>
+      <p:nvGrpSpPr>
+        <p:cNvPr id="1" name=""/>
+        <p:cNvGrpSpPr/>
+        <p:nvPr/>
+      </p:nvGrpSpPr>
+      <p:grpSpPr>
+        <a:xfrm>
+          <a:off x="0" y="0"/>
+          <a:ext cx="0" cy="0"/>
+          <a:chOff x="0" y="0"/>
+          <a:chExt cx="0" cy="0"/>
+        </a:xfrm>
+      </p:grpSpPr>
+      <p:sp>
+        <p:nvSpPr>
+          <p:cNvPr id="2" name="Text 0"/>
+          <p:cNvSpPr/>
+          <p:nvPr/>
+        </p:nvSpPr>
+        <p:spPr>
+          <a:xfrm>
+            <a:off x="457200" y="320040"/>
+            <a:ext cx="8229600" cy="457200"/>
+          </a:xfrm>
+          <a:prstGeom prst="rect">
+            <a:avLst/>
+          </a:prstGeom>
+          <a:noFill/>
+          <a:ln/>
+        </p:spPr>
+        <p:txBody>
+          <a:bodyPr wrap="square" rtlCol="0" anchor="ctr"/>
+          <a:lstStyle/>
+          <a:p>
+            <a:pPr indent="0" marL="0">
+              <a:buNone/>
+            </a:pPr>
+            <a:r>
+              <a:rPr lang="en-US" sz="2400" b="1" dirty="0">
+                <a:solidFill>
+                  <a:srgbClr val="DB2777"/>
+                </a:solidFill>
+              </a:rPr>
+              <a:t>Step 3 — Python Analysis</a:t>
+            </a:r>
+            <a:endParaRPr lang="en-US" sz="2400" dirty="0"/>
+          </a:p>
+        </p:txBody>
+      </p:sp>
+      <p:sp>
+        <p:nvSpPr>
+          <p:cNvPr id="3" name="Text 1"/>
+          <p:cNvSpPr/>
+          <p:nvPr/>
+        </p:nvSpPr>
+        <p:spPr>
+          <a:xfrm>
+            <a:off x="457200" y="868680"/>
+            <a:ext cx="8229600" cy="822960"/>
+          </a:xfrm>
+          <a:prstGeom prst="rect">
+            <a:avLst/>
+          </a:prstGeom>
+          <a:noFill/>
+          <a:ln/>
+        </p:spPr>
+        <p:txBody>
+          <a:bodyPr wrap="square" rtlCol="0" anchor="t"/>
+          <a:lstStyle/>
+          <a:p>
+            <a:pPr indent="0" marL="0">
+              <a:buNone/>
+            </a:pPr>
+            <a:r>
+              <a:rPr lang="en-US" sz="1500" dirty="0">
+                <a:solidFill>
+                  <a:srgbClr val="333333"/>
+                </a:solidFill>
+              </a:rPr>
+              <a:t>Used pandas to compare reporting turnaround before/after automation and to rank reps by revenue contribution.</a:t>
+            </a:r>
+            <a:endParaRPr lang="en-US" sz="1500" dirty="0"/>
+          </a:p>
+        </p:txBody>
+      </p:sp>
+      <p:sp>
+        <p:nvSpPr>
+          <p:cNvPr id="4" name="Shape 2"/>
+          <p:cNvSpPr/>
+          <p:nvPr/>
+        </p:nvSpPr>
+        <p:spPr>
+          <a:xfrm>
+            <a:off x="457200" y="1783080"/>
+            <a:ext cx="8229600" cy="2011680"/>
+          </a:xfrm>
+          <a:prstGeom prst="rect">
+            <a:avLst/>
+          </a:prstGeom>
+          <a:solidFill>
+            <a:srgbClr val="1E1E2E"/>
+          </a:solidFill>
+          <a:ln w="12700">
+            <a:solidFill>
+              <a:srgbClr val="444444"/>
+            </a:solidFill>
+            <a:prstDash val="solid"/>
+          </a:ln>
+        </p:spPr>
+      </p:sp>
+      <p:sp>
+        <p:nvSpPr>
+          <p:cNvPr id="5" name="Text 3"/>
+          <p:cNvSpPr/>
+          <p:nvPr/>
+        </p:nvSpPr>
+        <p:spPr>
+          <a:xfrm>
+            <a:off x="594360" y="1874520"/>
+            <a:ext cx="7955280" cy="1828800"/>
+          </a:xfrm>
+          <a:prstGeom prst="rect">
+            <a:avLst/>
+          </a:prstGeom>
+          <a:noFill/>
+          <a:ln/>
+        </p:spPr>
+        <p:txBody>
+          <a:bodyPr wrap="square" rtlCol="0" anchor="t"/>
+          <a:lstStyle/>
+          <a:p>
+            <a:pPr indent="0" marL="0">
+              <a:buNone/>
+            </a:pPr>
+            <a:r>
+              <a:rPr lang="en-US" sz="1100" dirty="0">
+                <a:solidFill>
+                  <a:srgbClr val="D4D4D4"/>
+                </a:solidFill>
+                <a:latin typeface="Consolas" pitchFamily="34" charset="0"/>
+                <a:ea typeface="Consolas" pitchFamily="34" charset="-122"/>
+                <a:cs typeface="Consolas" pitchFamily="34" charset="-120"/>
+              </a:rPr>
+              <a:t>rep_summary = df.groupby('rep_id')['sale_amount'].agg(['sum','count'])</a:t>
+            </a:r>
+            <a:endParaRPr lang="en-US" sz="1100" dirty="0"/>
+          </a:p>
+          <a:p>
+            <a:pPr indent="0" marL="0">
+              <a:buNone/>
+            </a:pPr>
+            <a:r>
+              <a:rPr lang="en-US" sz="1100" dirty="0">
+                <a:solidFill>
+                  <a:srgbClr val="D4D4D4"/>
+                </a:solidFill>
+                <a:latin typeface="Consolas" pitchFamily="34" charset="0"/>
+                <a:ea typeface="Consolas" pitchFamily="34" charset="-122"/>
+                <a:cs typeface="Consolas" pitchFamily="34" charset="-120"/>
+              </a:rPr>
+              <a:t>rep_summary['rank'] = rep_summary['sum'].rank(ascending=False)</a:t>
+            </a:r>
+            <a:endParaRPr lang="en-US" sz="1100" dirty="0"/>
+          </a:p>
+          <a:p>
+            <a:pPr indent="0" marL="0">
+              <a:buNone/>
+            </a:pPr>
+            <a:r>
+              <a:rPr lang="en-US" sz="1100" dirty="0">
+                <a:solidFill>
+                  <a:srgbClr val="D4D4D4"/>
+                </a:solidFill>
+                <a:latin typeface="Consolas" pitchFamily="34" charset="0"/>
+                <a:ea typeface="Consolas" pitchFamily="34" charset="-122"/>
+                <a:cs typeface="Consolas" pitchFamily="34" charset="-120"/>
+              </a:rPr>
+              <a:t>time_saved_pct = (old_hours - new_hours) / old_hours</a:t>
+            </a:r>
+            <a:endParaRPr lang="en-US" sz="1100" dirty="0"/>
+          </a:p>
+        </p:txBody>
+      </p:sp>
+    </p:spTree>
+  </p:cSld>
+  <p:clrMapOvr>
+    <a:masterClrMapping/>
+  </p:clrMapOvr>
+</p:sld>
+</file>
+
+<file path=ppt/slides/slide7.xml><?xml version="1.0" encoding="utf-8"?>
+<p:sld xmlns:a="http://schemas.openxmlformats.org/drawingml/2006/main" xmlns:r="http://schemas.openxmlformats.org/officeDocument/2006/relationships" xmlns:p="http://schemas.openxmlformats.org/presentationml/2006/main">
+  <p:cSld name="Slide 7">
+    <p:spTree>
+      <p:nvGrpSpPr>
+        <p:cNvPr id="1" name=""/>
+        <p:cNvGrpSpPr/>
+        <p:nvPr/>
+      </p:nvGrpSpPr>
+      <p:grpSpPr>
+        <a:xfrm>
+          <a:off x="0" y="0"/>
+          <a:ext cx="0" cy="0"/>
+          <a:chOff x="0" y="0"/>
+          <a:chExt cx="0" cy="0"/>
+        </a:xfrm>
+      </p:grpSpPr>
+      <p:sp>
+        <p:nvSpPr>
+          <p:cNvPr id="2" name="Text 0"/>
+          <p:cNvSpPr/>
+          <p:nvPr/>
+        </p:nvSpPr>
+        <p:spPr>
+          <a:xfrm>
+            <a:off x="457200" y="320040"/>
+            <a:ext cx="8229600" cy="548640"/>
+          </a:xfrm>
+          <a:prstGeom prst="rect">
+            <a:avLst/>
+          </a:prstGeom>
+          <a:noFill/>
+          <a:ln/>
+        </p:spPr>
+        <p:txBody>
+          <a:bodyPr wrap="square" rtlCol="0" anchor="ctr"/>
+          <a:lstStyle/>
+          <a:p>
+            <a:pPr indent="0" marL="0">
+              <a:buNone/>
+            </a:pPr>
+            <a:r>
+              <a:rPr lang="en-US" sz="2400" b="1" dirty="0">
+                <a:solidFill>
+                  <a:srgbClr val="059669"/>
+                </a:solidFill>
+              </a:rPr>
+              <a:t>Step 4 — Dashboard Development</a:t>
+            </a:r>
+            <a:endParaRPr lang="en-US" sz="2400" dirty="0"/>
+          </a:p>
+        </p:txBody>
+      </p:sp>
+      <p:sp>
+        <p:nvSpPr>
+          <p:cNvPr id="3" name="Text 1"/>
+          <p:cNvSpPr/>
+          <p:nvPr/>
+        </p:nvSpPr>
+        <p:spPr>
+          <a:xfrm>
+            <a:off x="457200" y="1188720"/>
+            <a:ext cx="8229600" cy="1645920"/>
+          </a:xfrm>
+          <a:prstGeom prst="rect">
+            <a:avLst/>
+          </a:prstGeom>
+          <a:noFill/>
+          <a:ln/>
+        </p:spPr>
+        <p:txBody>
+          <a:bodyPr wrap="square" rtlCol="0" anchor="t"/>
+          <a:lstStyle/>
+          <a:p>
+            <a:pPr indent="0" marL="0">
+              <a:buNone/>
+            </a:pPr>
+            <a:r>
+              <a:rPr lang="en-US" sz="1800" dirty="0">
+                <a:solidFill>
+                  <a:srgbClr val="333333"/>
+                </a:solidFill>
+              </a:rPr>
+              <a:t>Built an HTML/Chart.js dashboard showing KPI cards, a revenue-by-rep bar chart, and a monthly trend line.</a:t>
+            </a:r>
+            <a:endParaRPr lang="en-US" sz="1800" dirty="0"/>
+          </a:p>
+        </p:txBody>
+      </p:sp>
+    </p:spTree>
+  </p:cSld>
+  <p:clrMapOvr>
+    <a:masterClrMapping/>
+  </p:clrMapOvr>
+</p:sld>
+</file>
+
+<file path=ppt/slides/slide8.xml><?xml version="1.0" encoding="utf-8"?>
+<p:sld xmlns:a="http://schemas.openxmlformats.org/drawingml/2006/main" xmlns:r="http://schemas.openxmlformats.org/officeDocument/2006/relationships" xmlns:p="http://schemas.openxmlformats.org/presentationml/2006/main">
+  <p:cSld name="Slide 8">
+    <p:spTree>
+      <p:nvGrpSpPr>
+        <p:cNvPr id="1" name=""/>
+        <p:cNvGrpSpPr/>
+        <p:nvPr/>
+      </p:nvGrpSpPr>
+      <p:grpSpPr>
+        <a:xfrm>
+          <a:off x="0" y="0"/>
+          <a:ext cx="0" cy="0"/>
+          <a:chOff x="0" y="0"/>
+          <a:chExt cx="0" cy="0"/>
+        </a:xfrm>
+      </p:grpSpPr>
+      <p:sp>
+        <p:nvSpPr>
+          <p:cNvPr id="2" name="Text 0"/>
+          <p:cNvSpPr/>
+          <p:nvPr/>
+        </p:nvSpPr>
+        <p:spPr>
+          <a:xfrm>
+            <a:off x="457200" y="182880"/>
+            <a:ext cx="8229600" cy="457200"/>
+          </a:xfrm>
+          <a:prstGeom prst="rect">
+            <a:avLst/>
+          </a:prstGeom>
+          <a:noFill/>
+          <a:ln/>
+        </p:spPr>
+        <p:txBody>
+          <a:bodyPr wrap="square" rtlCol="0" anchor="ctr"/>
+          <a:lstStyle/>
+          <a:p>
+            <a:pPr indent="0" marL="0">
+              <a:buNone/>
+            </a:pPr>
+            <a:r>
+              <a:rPr lang="en-US" sz="2200" b="1" dirty="0">
+                <a:solidFill>
+                  <a:srgbClr val="2E5BFF"/>
+                </a:solidFill>
+              </a:rPr>
+              <a:t>Live Dashboard</a:t>
+            </a:r>
+            <a:endParaRPr lang="en-US" sz="2200" dirty="0"/>
+          </a:p>
+        </p:txBody>
+      </p:sp>
+      <p:pic>
+        <p:nvPicPr>
+          <p:cNvPr id="3" name="Image 0" descr="preencoded.png">    </p:cNvPr>
+          <p:cNvPicPr>
+            <a:picLocks noChangeAspect="1"/>
+          </p:cNvPicPr>
+          <p:nvPr/>
+        </p:nvPicPr>
+        <p:blipFill>
+          <a:blip r:embed="rId1"/>
+          <a:stretch>
+            <a:fillRect/>
+          </a:stretch>
+        </p:blipFill>
+        <p:spPr>
+          <a:xfrm>
+            <a:off x="1953329" y="685800"/>
+            <a:ext cx="5237342" cy="4206240"/>
+          </a:xfrm>
+          <a:prstGeom prst="rect">
+            <a:avLst/>
+          </a:prstGeom>
+        </p:spPr>
+      </p:pic>
+    </p:spTree>
+  </p:cSld>
+  <p:clrMapOvr>
+    <a:masterClrMapping/>
+  </p:clrMapOvr>
+</p:sld>
+</file>
+
+<file path=ppt/slides/slide9.xml><?xml version="1.0" encoding="utf-8"?>
+<p:sld xmlns:a="http://schemas.openxmlformats.org/drawingml/2006/main" xmlns:r="http://schemas.openxmlformats.org/officeDocument/2006/relationships" xmlns:p="http://schemas.openxmlformats.org/presentationml/2006/main">
+  <p:cSld name="Slide 9">
+    <p:spTree>
+      <p:nvGrpSpPr>
+        <p:cNvPr id="1" name=""/>
+        <p:cNvGrpSpPr/>
+        <p:nvPr/>
+      </p:nvGrpSpPr>
+      <p:grpSpPr>
+        <a:xfrm>
+          <a:off x="0" y="0"/>
+          <a:ext cx="0" cy="0"/>
+          <a:chOff x="0" y="0"/>
+          <a:chExt cx="0" cy="0"/>
+        </a:xfrm>
+      </p:grpSpPr>
+      <p:sp>
+        <p:nvSpPr>
+          <p:cNvPr id="2" name="Text 0"/>
+          <p:cNvSpPr/>
+          <p:nvPr/>
+        </p:nvSpPr>
+        <p:spPr>
+          <a:xfrm>
+            <a:off x="457200" y="320040"/>
+            <a:ext cx="8229600" cy="548640"/>
+          </a:xfrm>
+          <a:prstGeom prst="rect">
+            <a:avLst/>
+          </a:prstGeom>
+          <a:noFill/>
+          <a:ln/>
+        </p:spPr>
+        <p:txBody>
+          <a:bodyPr wrap="square" rtlCol="0" anchor="ctr"/>
+          <a:lstStyle/>
+          <a:p>
+            <a:pPr indent="0" marL="0">
+              <a:buNone/>
+            </a:pPr>
+            <a:r>
+              <a:rPr lang="en-US" sz="2600" b="1" dirty="0">
+                <a:solidFill>
+                  <a:srgbClr val="2E5BFF"/>
+                </a:solidFill>
+              </a:rPr>
+              <a:t>Key Results</a:t>
+            </a:r>
+            <a:endParaRPr lang="en-US" sz="2600" dirty="0"/>
+          </a:p>
+        </p:txBody>
+      </p:sp>
+      <p:sp>
+        <p:nvSpPr>
+          <p:cNvPr id="3" name="Shape 1"/>
+          <p:cNvSpPr/>
+          <p:nvPr/>
+        </p:nvSpPr>
+        <p:spPr>
+          <a:xfrm>
+            <a:off x="457200" y="1280160"/>
+            <a:ext cx="3840480" cy="1280160"/>
+          </a:xfrm>
+          <a:prstGeom prst="roundRect">
+            <a:avLst>
+              <a:gd name="adj" fmla="val 5714"/>
+            </a:avLst>
+          </a:prstGeom>
+          <a:solidFill>
+            <a:srgbClr val="F1F5F9"/>
+          </a:solidFill>
+          <a:ln w="12700">
+            <a:solidFill>
+              <a:srgbClr val="CBD5E1"/>
+            </a:solidFill>
+            <a:prstDash val="solid"/>
+          </a:ln>
+        </p:spPr>
       </p:sp>
       <p:sp>
         <p:nvSpPr>
@@ -2700,8 +3362,8 @@
         </p:nvSpPr>
         <p:spPr>
           <a:xfrm>
-            <a:off x="731520" y="3246120"/>
-            <a:ext cx="10698480" cy="548640"/>
+            <a:off x="457200" y="1371600"/>
+            <a:ext cx="3840480" cy="685800"/>
           </a:xfrm>
           <a:prstGeom prst="rect">
             <a:avLst/>
@@ -2713,18 +3375,18 @@
           <a:bodyPr wrap="square" rtlCol="0" anchor="ctr"/>
           <a:lstStyle/>
           <a:p>
-            <a:pPr indent="0" marL="0">
-              <a:buNone/>
-            </a:pPr>
-            <a:r>
-              <a:rPr lang="en-US" sz="1800" dirty="0">
-                <a:solidFill>
-                  <a:srgbClr val="93C5FD"/>
-                </a:solidFill>
-              </a:rPr>
-              <a:t>Questions &amp; Discussion</a:t>
-            </a:r>
-            <a:endParaRPr lang="en-US" sz="1800" dirty="0"/>
+            <a:pPr algn="ctr" indent="0" marL="0">
+              <a:buNone/>
+            </a:pPr>
+            <a:r>
+              <a:rPr lang="en-US" sz="2800" b="1" dirty="0">
+                <a:solidFill>
+                  <a:srgbClr val="2E5BFF"/>
+                </a:solidFill>
+              </a:rPr>
+              <a:t>260</a:t>
+            </a:r>
+            <a:endParaRPr lang="en-US" sz="2800" dirty="0"/>
           </a:p>
         </p:txBody>
       </p:sp>
@@ -2736,8 +3398,8 @@
         </p:nvSpPr>
         <p:spPr>
           <a:xfrm>
-            <a:off x="731520" y="6035040"/>
-            <a:ext cx="10698480" cy="365760"/>
+            <a:off x="457200" y="2057400"/>
+            <a:ext cx="3840480" cy="411480"/>
           </a:xfrm>
           <a:prstGeom prst="rect">
             <a:avLst/>
@@ -2749,16 +3411,313 @@
           <a:bodyPr wrap="square" rtlCol="0" anchor="ctr"/>
           <a:lstStyle/>
           <a:p>
-            <a:pPr indent="0" marL="0">
+            <a:pPr algn="ctr" indent="0" marL="0">
               <a:buNone/>
             </a:pPr>
             <a:r>
               <a:rPr lang="en-US" sz="1300" dirty="0">
                 <a:solidFill>
-                  <a:srgbClr val="D1D5DB"/>
-                </a:solidFill>
-              </a:rPr>
-              <a:t>Sazzadul Islam  |  sazzadulislam352@gmail.com  |  github.com/sazzadulislam352</a:t>
+                  <a:srgbClr val="475569"/>
+                </a:solidFill>
+              </a:rPr>
+              <a:t>Sales Records</a:t>
+            </a:r>
+            <a:endParaRPr lang="en-US" sz="1300" dirty="0"/>
+          </a:p>
+        </p:txBody>
+      </p:sp>
+      <p:sp>
+        <p:nvSpPr>
+          <p:cNvPr id="6" name="Shape 4"/>
+          <p:cNvSpPr/>
+          <p:nvPr/>
+        </p:nvSpPr>
+        <p:spPr>
+          <a:xfrm>
+            <a:off x="4663440" y="1280160"/>
+            <a:ext cx="3840480" cy="1280160"/>
+          </a:xfrm>
+          <a:prstGeom prst="roundRect">
+            <a:avLst>
+              <a:gd name="adj" fmla="val 5714"/>
+            </a:avLst>
+          </a:prstGeom>
+          <a:solidFill>
+            <a:srgbClr val="F1F5F9"/>
+          </a:solidFill>
+          <a:ln w="12700">
+            <a:solidFill>
+              <a:srgbClr val="CBD5E1"/>
+            </a:solidFill>
+            <a:prstDash val="solid"/>
+          </a:ln>
+        </p:spPr>
+      </p:sp>
+      <p:sp>
+        <p:nvSpPr>
+          <p:cNvPr id="7" name="Text 5"/>
+          <p:cNvSpPr/>
+          <p:nvPr/>
+        </p:nvSpPr>
+        <p:spPr>
+          <a:xfrm>
+            <a:off x="4663440" y="1371600"/>
+            <a:ext cx="3840480" cy="685800"/>
+          </a:xfrm>
+          <a:prstGeom prst="rect">
+            <a:avLst/>
+          </a:prstGeom>
+          <a:noFill/>
+          <a:ln/>
+        </p:spPr>
+        <p:txBody>
+          <a:bodyPr wrap="square" rtlCol="0" anchor="ctr"/>
+          <a:lstStyle/>
+          <a:p>
+            <a:pPr algn="ctr" indent="0" marL="0">
+              <a:buNone/>
+            </a:pPr>
+            <a:r>
+              <a:rPr lang="en-US" sz="2800" b="1" dirty="0">
+                <a:solidFill>
+                  <a:srgbClr val="2E5BFF"/>
+                </a:solidFill>
+              </a:rPr>
+              <a:t>10</a:t>
+            </a:r>
+            <a:endParaRPr lang="en-US" sz="2800" dirty="0"/>
+          </a:p>
+        </p:txBody>
+      </p:sp>
+      <p:sp>
+        <p:nvSpPr>
+          <p:cNvPr id="8" name="Text 6"/>
+          <p:cNvSpPr/>
+          <p:nvPr/>
+        </p:nvSpPr>
+        <p:spPr>
+          <a:xfrm>
+            <a:off x="4663440" y="2057400"/>
+            <a:ext cx="3840480" cy="411480"/>
+          </a:xfrm>
+          <a:prstGeom prst="rect">
+            <a:avLst/>
+          </a:prstGeom>
+          <a:noFill/>
+          <a:ln/>
+        </p:spPr>
+        <p:txBody>
+          <a:bodyPr wrap="square" rtlCol="0" anchor="ctr"/>
+          <a:lstStyle/>
+          <a:p>
+            <a:pPr algn="ctr" indent="0" marL="0">
+              <a:buNone/>
+            </a:pPr>
+            <a:r>
+              <a:rPr lang="en-US" sz="1300" dirty="0">
+                <a:solidFill>
+                  <a:srgbClr val="475569"/>
+                </a:solidFill>
+              </a:rPr>
+              <a:t>Sales Reps</a:t>
+            </a:r>
+            <a:endParaRPr lang="en-US" sz="1300" dirty="0"/>
+          </a:p>
+        </p:txBody>
+      </p:sp>
+      <p:sp>
+        <p:nvSpPr>
+          <p:cNvPr id="9" name="Shape 7"/>
+          <p:cNvSpPr/>
+          <p:nvPr/>
+        </p:nvSpPr>
+        <p:spPr>
+          <a:xfrm>
+            <a:off x="457200" y="2834640"/>
+            <a:ext cx="3840480" cy="1280160"/>
+          </a:xfrm>
+          <a:prstGeom prst="roundRect">
+            <a:avLst>
+              <a:gd name="adj" fmla="val 5714"/>
+            </a:avLst>
+          </a:prstGeom>
+          <a:solidFill>
+            <a:srgbClr val="F1F5F9"/>
+          </a:solidFill>
+          <a:ln w="12700">
+            <a:solidFill>
+              <a:srgbClr val="CBD5E1"/>
+            </a:solidFill>
+            <a:prstDash val="solid"/>
+          </a:ln>
+        </p:spPr>
+      </p:sp>
+      <p:sp>
+        <p:nvSpPr>
+          <p:cNvPr id="10" name="Text 8"/>
+          <p:cNvSpPr/>
+          <p:nvPr/>
+        </p:nvSpPr>
+        <p:spPr>
+          <a:xfrm>
+            <a:off x="457200" y="2926080"/>
+            <a:ext cx="3840480" cy="685800"/>
+          </a:xfrm>
+          <a:prstGeom prst="rect">
+            <a:avLst/>
+          </a:prstGeom>
+          <a:noFill/>
+          <a:ln/>
+        </p:spPr>
+        <p:txBody>
+          <a:bodyPr wrap="square" rtlCol="0" anchor="ctr"/>
+          <a:lstStyle/>
+          <a:p>
+            <a:pPr algn="ctr" indent="0" marL="0">
+              <a:buNone/>
+            </a:pPr>
+            <a:r>
+              <a:rPr lang="en-US" sz="2800" b="1" dirty="0">
+                <a:solidFill>
+                  <a:srgbClr val="2E5BFF"/>
+                </a:solidFill>
+              </a:rPr>
+              <a:t>$232,564</a:t>
+            </a:r>
+            <a:endParaRPr lang="en-US" sz="2800" dirty="0"/>
+          </a:p>
+        </p:txBody>
+      </p:sp>
+      <p:sp>
+        <p:nvSpPr>
+          <p:cNvPr id="11" name="Text 9"/>
+          <p:cNvSpPr/>
+          <p:nvPr/>
+        </p:nvSpPr>
+        <p:spPr>
+          <a:xfrm>
+            <a:off x="457200" y="3611880"/>
+            <a:ext cx="3840480" cy="411480"/>
+          </a:xfrm>
+          <a:prstGeom prst="rect">
+            <a:avLst/>
+          </a:prstGeom>
+          <a:noFill/>
+          <a:ln/>
+        </p:spPr>
+        <p:txBody>
+          <a:bodyPr wrap="square" rtlCol="0" anchor="ctr"/>
+          <a:lstStyle/>
+          <a:p>
+            <a:pPr algn="ctr" indent="0" marL="0">
+              <a:buNone/>
+            </a:pPr>
+            <a:r>
+              <a:rPr lang="en-US" sz="1300" dirty="0">
+                <a:solidFill>
+                  <a:srgbClr val="475569"/>
+                </a:solidFill>
+              </a:rPr>
+              <a:t>Total Revenue</a:t>
+            </a:r>
+            <a:endParaRPr lang="en-US" sz="1300" dirty="0"/>
+          </a:p>
+        </p:txBody>
+      </p:sp>
+      <p:sp>
+        <p:nvSpPr>
+          <p:cNvPr id="12" name="Shape 10"/>
+          <p:cNvSpPr/>
+          <p:nvPr/>
+        </p:nvSpPr>
+        <p:spPr>
+          <a:xfrm>
+            <a:off x="4663440" y="2834640"/>
+            <a:ext cx="3840480" cy="1280160"/>
+          </a:xfrm>
+          <a:prstGeom prst="roundRect">
+            <a:avLst>
+              <a:gd name="adj" fmla="val 5714"/>
+            </a:avLst>
+          </a:prstGeom>
+          <a:solidFill>
+            <a:srgbClr val="F1F5F9"/>
+          </a:solidFill>
+          <a:ln w="12700">
+            <a:solidFill>
+              <a:srgbClr val="CBD5E1"/>
+            </a:solidFill>
+            <a:prstDash val="solid"/>
+          </a:ln>
+        </p:spPr>
+      </p:sp>
+      <p:sp>
+        <p:nvSpPr>
+          <p:cNvPr id="13" name="Text 11"/>
+          <p:cNvSpPr/>
+          <p:nvPr/>
+        </p:nvSpPr>
+        <p:spPr>
+          <a:xfrm>
+            <a:off x="4663440" y="2926080"/>
+            <a:ext cx="3840480" cy="685800"/>
+          </a:xfrm>
+          <a:prstGeom prst="rect">
+            <a:avLst/>
+          </a:prstGeom>
+          <a:noFill/>
+          <a:ln/>
+        </p:spPr>
+        <p:txBody>
+          <a:bodyPr wrap="square" rtlCol="0" anchor="ctr"/>
+          <a:lstStyle/>
+          <a:p>
+            <a:pPr algn="ctr" indent="0" marL="0">
+              <a:buNone/>
+            </a:pPr>
+            <a:r>
+              <a:rPr lang="en-US" sz="2800" b="1" dirty="0">
+                <a:solidFill>
+                  <a:srgbClr val="2E5BFF"/>
+                </a:solidFill>
+              </a:rPr>
+              <a:t>40%</a:t>
+            </a:r>
+            <a:endParaRPr lang="en-US" sz="2800" dirty="0"/>
+          </a:p>
+        </p:txBody>
+      </p:sp>
+      <p:sp>
+        <p:nvSpPr>
+          <p:cNvPr id="14" name="Text 12"/>
+          <p:cNvSpPr/>
+          <p:nvPr/>
+        </p:nvSpPr>
+        <p:spPr>
+          <a:xfrm>
+            <a:off x="4663440" y="3611880"/>
+            <a:ext cx="3840480" cy="411480"/>
+          </a:xfrm>
+          <a:prstGeom prst="rect">
+            <a:avLst/>
+          </a:prstGeom>
+          <a:noFill/>
+          <a:ln/>
+        </p:spPr>
+        <p:txBody>
+          <a:bodyPr wrap="square" rtlCol="0" anchor="ctr"/>
+          <a:lstStyle/>
+          <a:p>
+            <a:pPr algn="ctr" indent="0" marL="0">
+              <a:buNone/>
+            </a:pPr>
+            <a:r>
+              <a:rPr lang="en-US" sz="1300" dirty="0">
+                <a:solidFill>
+                  <a:srgbClr val="475569"/>
+                </a:solidFill>
+              </a:rPr>
+              <a:t>Faster Reporting</a:t>
             </a:r>
             <a:endParaRPr lang="en-US" sz="1300" dirty="0"/>
           </a:p>
